--- a/slides/P4-SHORT.pptx
+++ b/slides/P4-SHORT.pptx
@@ -20,6 +20,7 @@
     <p:sldId id="268" r:id="rId19"/>
     <p:sldId id="269" r:id="rId20"/>
     <p:sldId id="270" r:id="rId21"/>
+    <p:sldId id="271" r:id="rId22"/>
   </p:sldIdLst>
   <p:sldSz cx="12191695" cy="6858000" type="screen4x3"/>
   <p:notesSz cx="6858000" cy="9144000"/>
@@ -3308,7 +3309,7 @@
                 </a:solidFill>
                 <a:latin typeface="Calibri"/>
               </a:rPr>
-              <a:t>1/15</a:t>
+              <a:t>1/16</a:t>
             </a:r>
           </a:p>
         </p:txBody>
@@ -3569,7 +3570,7 @@
                 </a:solidFill>
                 <a:latin typeface="Calibri"/>
               </a:rPr>
-              <a:t>10/15</a:t>
+              <a:t>10/16</a:t>
             </a:r>
           </a:p>
         </p:txBody>
@@ -3751,7 +3752,7 @@
                 </a:solidFill>
                 <a:latin typeface="Calibri"/>
               </a:rPr>
-              <a:t>11/15</a:t>
+              <a:t>11/16</a:t>
             </a:r>
           </a:p>
         </p:txBody>
@@ -5072,7 +5073,7 @@
                 </a:solidFill>
                 <a:latin typeface="Calibri"/>
               </a:rPr>
-              <a:t>12/15</a:t>
+              <a:t>12/16</a:t>
             </a:r>
           </a:p>
         </p:txBody>
@@ -5125,7 +5126,7 @@
                 </a:solidFill>
                 <a:latin typeface="Calibri"/>
               </a:rPr>
-              <a:t>Coverage divergence — content-domain reliability axis</a:t>
+              <a:t>Third-corpus replication — TREC-COVID biomedical (300 pairs)</a:t>
             </a:r>
           </a:p>
         </p:txBody>
@@ -5139,8 +5140,8 @@
           <p:nvPr/>
         </p:nvGraphicFramePr>
         <p:xfrm>
-          <a:off x="640080" y="1371600"/>
-          <a:ext cx="8686800" cy="3108960"/>
+          <a:off x="640080" y="1280160"/>
+          <a:ext cx="7132320" cy="2798064"/>
         </p:xfrm>
         <a:graphic>
           <a:graphicData uri="http://schemas.openxmlformats.org/drawingml/2006/table">
@@ -5149,9 +5150,10 @@
                 <a:tableStyleId>{5C22544A-7EE6-4342-B048-85BDC9FD1C3A}</a:tableStyleId>
               </a:tblPr>
               <a:tblGrid>
-                <a:gridCol w="3200400"/>
-                <a:gridCol w="2743200"/>
-                <a:gridCol w="2743200"/>
+                <a:gridCol w="548640"/>
+                <a:gridCol w="3657600"/>
+                <a:gridCol w="1645920"/>
+                <a:gridCol w="1280160"/>
               </a:tblGrid>
               <a:tr h="310896">
                 <a:tc>
@@ -5167,6 +5169,29 @@
                           </a:solidFill>
                           <a:latin typeface="Calibri"/>
                         </a:rPr>
+                        <a:t>Rank</a:t>
+                      </a:r>
+                    </a:p>
+                  </a:txBody>
+                  <a:tcPr marL="73152" marR="73152" marT="36576" marB="36576">
+                    <a:solidFill>
+                      <a:srgbClr val="0E4A86"/>
+                    </a:solidFill>
+                  </a:tcPr>
+                </a:tc>
+                <a:tc>
+                  <a:txBody>
+                    <a:bodyPr wrap="square"/>
+                    <a:lstStyle/>
+                    <a:p>
+                      <a:pPr algn="r"/>
+                      <a:r>
+                        <a:rPr sz="1400" b="1">
+                          <a:solidFill>
+                            <a:srgbClr val="FFFFFF"/>
+                          </a:solidFill>
+                          <a:latin typeface="Calibri"/>
+                        </a:rPr>
                         <a:t>Judge</a:t>
                       </a:r>
                     </a:p>
@@ -5190,7 +5215,7 @@
                           </a:solidFill>
                           <a:latin typeface="Calibri"/>
                         </a:rPr>
-                        <a:t>TREC RAG 2024 (n=537)</a:t>
+                        <a:t>κ vs NIST qrels</a:t>
                       </a:r>
                     </a:p>
                   </a:txBody>
@@ -5213,7 +5238,7 @@
                           </a:solidFill>
                           <a:latin typeface="Calibri"/>
                         </a:rPr>
-                        <a:t>BEIR scifact (n=300)</a:t>
+                        <a:t>valid/300</a:t>
                       </a:r>
                     </a:p>
                   </a:txBody>
@@ -5238,7 +5263,7 @@
                           </a:solidFill>
                           <a:latin typeface="Calibri"/>
                         </a:rPr>
-                        <a:t>GPT-5.5 (reasoning=low)</a:t>
+                        <a:t>1</a:t>
                       </a:r>
                     </a:p>
                   </a:txBody>
@@ -5261,7 +5286,7 @@
                           </a:solidFill>
                           <a:latin typeface="Calibri"/>
                         </a:rPr>
-                        <a:t>100%</a:t>
+                        <a:t>Claude Opus 4.7</a:t>
                       </a:r>
                     </a:p>
                   </a:txBody>
@@ -5284,7 +5309,30 @@
                           </a:solidFill>
                           <a:latin typeface="Calibri"/>
                         </a:rPr>
-                        <a:t>100%</a:t>
+                        <a:t>0.5323</a:t>
+                      </a:r>
+                    </a:p>
+                  </a:txBody>
+                  <a:tcPr marL="73152" marR="73152" marT="36576" marB="36576">
+                    <a:solidFill>
+                      <a:srgbClr val="FFFFFF"/>
+                    </a:solidFill>
+                  </a:tcPr>
+                </a:tc>
+                <a:tc>
+                  <a:txBody>
+                    <a:bodyPr wrap="square"/>
+                    <a:lstStyle/>
+                    <a:p>
+                      <a:pPr algn="r"/>
+                      <a:r>
+                        <a:rPr sz="1400">
+                          <a:solidFill>
+                            <a:srgbClr val="1A1A1A"/>
+                          </a:solidFill>
+                          <a:latin typeface="Calibri"/>
+                        </a:rPr>
+                        <a:t>251</a:t>
                       </a:r>
                     </a:p>
                   </a:txBody>
@@ -5309,7 +5357,7 @@
                           </a:solidFill>
                           <a:latin typeface="Calibri"/>
                         </a:rPr>
-                        <a:t>GPT-4o</a:t>
+                        <a:t>2</a:t>
                       </a:r>
                     </a:p>
                   </a:txBody>
@@ -5332,7 +5380,7 @@
                           </a:solidFill>
                           <a:latin typeface="Calibri"/>
                         </a:rPr>
-                        <a:t>100%</a:t>
+                        <a:t>Claude Sonnet 4.6</a:t>
                       </a:r>
                     </a:p>
                   </a:txBody>
@@ -5355,7 +5403,30 @@
                           </a:solidFill>
                           <a:latin typeface="Calibri"/>
                         </a:rPr>
-                        <a:t>100%</a:t>
+                        <a:t>0.4238</a:t>
+                      </a:r>
+                    </a:p>
+                  </a:txBody>
+                  <a:tcPr marL="73152" marR="73152" marT="36576" marB="36576">
+                    <a:solidFill>
+                      <a:srgbClr val="F5F5F5"/>
+                    </a:solidFill>
+                  </a:tcPr>
+                </a:tc>
+                <a:tc>
+                  <a:txBody>
+                    <a:bodyPr wrap="square"/>
+                    <a:lstStyle/>
+                    <a:p>
+                      <a:pPr algn="r"/>
+                      <a:r>
+                        <a:rPr sz="1400">
+                          <a:solidFill>
+                            <a:srgbClr val="1A1A1A"/>
+                          </a:solidFill>
+                          <a:latin typeface="Calibri"/>
+                        </a:rPr>
+                        <a:t>300</a:t>
                       </a:r>
                     </a:p>
                   </a:txBody>
@@ -5380,7 +5451,7 @@
                           </a:solidFill>
                           <a:latin typeface="Calibri"/>
                         </a:rPr>
-                        <a:t>Claude Opus 4.7</a:t>
+                        <a:t>3</a:t>
                       </a:r>
                     </a:p>
                   </a:txBody>
@@ -5403,7 +5474,7 @@
                           </a:solidFill>
                           <a:latin typeface="Calibri"/>
                         </a:rPr>
-                        <a:t>100%</a:t>
+                        <a:t>GPT-4o</a:t>
                       </a:r>
                     </a:p>
                   </a:txBody>
@@ -5426,7 +5497,30 @@
                           </a:solidFill>
                           <a:latin typeface="Calibri"/>
                         </a:rPr>
-                        <a:t>95%</a:t>
+                        <a:t>0.3874</a:t>
+                      </a:r>
+                    </a:p>
+                  </a:txBody>
+                  <a:tcPr marL="73152" marR="73152" marT="36576" marB="36576">
+                    <a:solidFill>
+                      <a:srgbClr val="FFFFFF"/>
+                    </a:solidFill>
+                  </a:tcPr>
+                </a:tc>
+                <a:tc>
+                  <a:txBody>
+                    <a:bodyPr wrap="square"/>
+                    <a:lstStyle/>
+                    <a:p>
+                      <a:pPr algn="r"/>
+                      <a:r>
+                        <a:rPr sz="1400">
+                          <a:solidFill>
+                            <a:srgbClr val="1A1A1A"/>
+                          </a:solidFill>
+                          <a:latin typeface="Calibri"/>
+                        </a:rPr>
+                        <a:t>300</a:t>
                       </a:r>
                     </a:p>
                   </a:txBody>
@@ -5451,7 +5545,7 @@
                           </a:solidFill>
                           <a:latin typeface="Calibri"/>
                         </a:rPr>
-                        <a:t>Claude Sonnet 4.6</a:t>
+                        <a:t>4</a:t>
                       </a:r>
                     </a:p>
                   </a:txBody>
@@ -5474,7 +5568,7 @@
                           </a:solidFill>
                           <a:latin typeface="Calibri"/>
                         </a:rPr>
-                        <a:t>100%</a:t>
+                        <a:t>GPT-5.5 (reasoning=low)</a:t>
                       </a:r>
                     </a:p>
                   </a:txBody>
@@ -5497,7 +5591,30 @@
                           </a:solidFill>
                           <a:latin typeface="Calibri"/>
                         </a:rPr>
-                        <a:t>99.7%</a:t>
+                        <a:t>0.3871</a:t>
+                      </a:r>
+                    </a:p>
+                  </a:txBody>
+                  <a:tcPr marL="73152" marR="73152" marT="36576" marB="36576">
+                    <a:solidFill>
+                      <a:srgbClr val="F5F5F5"/>
+                    </a:solidFill>
+                  </a:tcPr>
+                </a:tc>
+                <a:tc>
+                  <a:txBody>
+                    <a:bodyPr wrap="square"/>
+                    <a:lstStyle/>
+                    <a:p>
+                      <a:pPr algn="r"/>
+                      <a:r>
+                        <a:rPr sz="1400">
+                          <a:solidFill>
+                            <a:srgbClr val="1A1A1A"/>
+                          </a:solidFill>
+                          <a:latin typeface="Calibri"/>
+                        </a:rPr>
+                        <a:t>300</a:t>
                       </a:r>
                     </a:p>
                   </a:txBody>
@@ -5522,7 +5639,7 @@
                           </a:solidFill>
                           <a:latin typeface="Calibri"/>
                         </a:rPr>
-                        <a:t>Qwen 3.6 Plus</a:t>
+                        <a:t>5</a:t>
                       </a:r>
                     </a:p>
                   </a:txBody>
@@ -5545,7 +5662,7 @@
                           </a:solidFill>
                           <a:latin typeface="Calibri"/>
                         </a:rPr>
-                        <a:t>100%</a:t>
+                        <a:t>DeepSeek V4 Pro</a:t>
                       </a:r>
                     </a:p>
                   </a:txBody>
@@ -5568,7 +5685,30 @@
                           </a:solidFill>
                           <a:latin typeface="Calibri"/>
                         </a:rPr>
-                        <a:t>100%</a:t>
+                        <a:t>0.3144</a:t>
+                      </a:r>
+                    </a:p>
+                  </a:txBody>
+                  <a:tcPr marL="73152" marR="73152" marT="36576" marB="36576">
+                    <a:solidFill>
+                      <a:srgbClr val="FFFFFF"/>
+                    </a:solidFill>
+                  </a:tcPr>
+                </a:tc>
+                <a:tc>
+                  <a:txBody>
+                    <a:bodyPr wrap="square"/>
+                    <a:lstStyle/>
+                    <a:p>
+                      <a:pPr algn="r"/>
+                      <a:r>
+                        <a:rPr sz="1400">
+                          <a:solidFill>
+                            <a:srgbClr val="1A1A1A"/>
+                          </a:solidFill>
+                          <a:latin typeface="Calibri"/>
+                        </a:rPr>
+                        <a:t>250</a:t>
                       </a:r>
                     </a:p>
                   </a:txBody>
@@ -5593,7 +5733,7 @@
                           </a:solidFill>
                           <a:latin typeface="Calibri"/>
                         </a:rPr>
-                        <a:t>Gemma 4 26B</a:t>
+                        <a:t>6</a:t>
                       </a:r>
                     </a:p>
                   </a:txBody>
@@ -5616,7 +5756,7 @@
                           </a:solidFill>
                           <a:latin typeface="Calibri"/>
                         </a:rPr>
-                        <a:t>100%</a:t>
+                        <a:t>Gemini 3.1 Pro Preview</a:t>
                       </a:r>
                     </a:p>
                   </a:txBody>
@@ -5639,7 +5779,30 @@
                           </a:solidFill>
                           <a:latin typeface="Calibri"/>
                         </a:rPr>
-                        <a:t>100%</a:t>
+                        <a:t>0.2202</a:t>
+                      </a:r>
+                    </a:p>
+                  </a:txBody>
+                  <a:tcPr marL="73152" marR="73152" marT="36576" marB="36576">
+                    <a:solidFill>
+                      <a:srgbClr val="F5F5F5"/>
+                    </a:solidFill>
+                  </a:tcPr>
+                </a:tc>
+                <a:tc>
+                  <a:txBody>
+                    <a:bodyPr wrap="square"/>
+                    <a:lstStyle/>
+                    <a:p>
+                      <a:pPr algn="r"/>
+                      <a:r>
+                        <a:rPr sz="1400">
+                          <a:solidFill>
+                            <a:srgbClr val="1A1A1A"/>
+                          </a:solidFill>
+                          <a:latin typeface="Calibri"/>
+                        </a:rPr>
+                        <a:t>133</a:t>
                       </a:r>
                     </a:p>
                   </a:txBody>
@@ -5664,7 +5827,7 @@
                           </a:solidFill>
                           <a:latin typeface="Calibri"/>
                         </a:rPr>
-                        <a:t>DeepSeek V4 Pro</a:t>
+                        <a:t>—</a:t>
                       </a:r>
                     </a:p>
                   </a:txBody>
@@ -5687,7 +5850,7 @@
                           </a:solidFill>
                           <a:latin typeface="Calibri"/>
                         </a:rPr>
-                        <a:t>39%</a:t>
+                        <a:t>Gemini 2.5 Pro</a:t>
                       </a:r>
                     </a:p>
                   </a:txBody>
@@ -5710,7 +5873,30 @@
                           </a:solidFill>
                           <a:latin typeface="Calibri"/>
                         </a:rPr>
-                        <a:t>84%</a:t>
+                        <a:t>n/a (small-n)</a:t>
+                      </a:r>
+                    </a:p>
+                  </a:txBody>
+                  <a:tcPr marL="73152" marR="73152" marT="36576" marB="36576">
+                    <a:solidFill>
+                      <a:srgbClr val="FFFFFF"/>
+                    </a:solidFill>
+                  </a:tcPr>
+                </a:tc>
+                <a:tc>
+                  <a:txBody>
+                    <a:bodyPr wrap="square"/>
+                    <a:lstStyle/>
+                    <a:p>
+                      <a:pPr algn="r"/>
+                      <a:r>
+                        <a:rPr sz="1400">
+                          <a:solidFill>
+                            <a:srgbClr val="1A1A1A"/>
+                          </a:solidFill>
+                          <a:latin typeface="Calibri"/>
+                        </a:rPr>
+                        <a:t>19</a:t>
                       </a:r>
                     </a:p>
                   </a:txBody>
@@ -5735,7 +5921,7 @@
                           </a:solidFill>
                           <a:latin typeface="Calibri"/>
                         </a:rPr>
-                        <a:t>Gemini 3.1 Pro Preview</a:t>
+                        <a:t/>
                       </a:r>
                     </a:p>
                   </a:txBody>
@@ -5758,7 +5944,7 @@
                           </a:solidFill>
                           <a:latin typeface="Calibri"/>
                         </a:rPr>
-                        <a:t>24%</a:t>
+                        <a:t>Frontier-7 ensemble median</a:t>
                       </a:r>
                     </a:p>
                   </a:txBody>
@@ -5781,7 +5967,7 @@
                           </a:solidFill>
                           <a:latin typeface="Calibri"/>
                         </a:rPr>
-                        <a:t>60%</a:t>
+                        <a:t>0.4462</a:t>
                       </a:r>
                     </a:p>
                   </a:txBody>
@@ -5791,14 +5977,12 @@
                     </a:solidFill>
                   </a:tcPr>
                 </a:tc>
-              </a:tr>
-              <a:tr h="310896">
-                <a:tc>
-                  <a:txBody>
-                    <a:bodyPr wrap="square"/>
-                    <a:lstStyle/>
-                    <a:p>
-                      <a:pPr algn="l"/>
+                <a:tc>
+                  <a:txBody>
+                    <a:bodyPr wrap="square"/>
+                    <a:lstStyle/>
+                    <a:p>
+                      <a:pPr algn="r"/>
                       <a:r>
                         <a:rPr sz="1400">
                           <a:solidFill>
@@ -5806,59 +5990,13 @@
                           </a:solidFill>
                           <a:latin typeface="Calibri"/>
                         </a:rPr>
-                        <a:t>Gemini 2.5 Pro</a:t>
-                      </a:r>
-                    </a:p>
-                  </a:txBody>
-                  <a:tcPr marL="73152" marR="73152" marT="36576" marB="36576">
-                    <a:solidFill>
-                      <a:srgbClr val="FFFFFF"/>
-                    </a:solidFill>
-                  </a:tcPr>
-                </a:tc>
-                <a:tc>
-                  <a:txBody>
-                    <a:bodyPr wrap="square"/>
-                    <a:lstStyle/>
-                    <a:p>
-                      <a:pPr algn="r"/>
-                      <a:r>
-                        <a:rPr sz="1400">
-                          <a:solidFill>
-                            <a:srgbClr val="1A1A1A"/>
-                          </a:solidFill>
-                          <a:latin typeface="Calibri"/>
-                        </a:rPr>
-                        <a:t>17%</a:t>
-                      </a:r>
-                    </a:p>
-                  </a:txBody>
-                  <a:tcPr marL="73152" marR="73152" marT="36576" marB="36576">
-                    <a:solidFill>
-                      <a:srgbClr val="FFFFFF"/>
-                    </a:solidFill>
-                  </a:tcPr>
-                </a:tc>
-                <a:tc>
-                  <a:txBody>
-                    <a:bodyPr wrap="square"/>
-                    <a:lstStyle/>
-                    <a:p>
-                      <a:pPr algn="r"/>
-                      <a:r>
-                        <a:rPr sz="1400">
-                          <a:solidFill>
-                            <a:srgbClr val="1A1A1A"/>
-                          </a:solidFill>
-                          <a:latin typeface="Calibri"/>
-                        </a:rPr>
-                        <a:t>86%</a:t>
-                      </a:r>
-                    </a:p>
-                  </a:txBody>
-                  <a:tcPr marL="73152" marR="73152" marT="36576" marB="36576">
-                    <a:solidFill>
-                      <a:srgbClr val="FFFFFF"/>
+                        <a:t>300</a:t>
+                      </a:r>
+                    </a:p>
+                  </a:txBody>
+                  <a:tcPr marL="73152" marR="73152" marT="36576" marB="36576">
+                    <a:solidFill>
+                      <a:srgbClr val="F5F5F5"/>
                     </a:solidFill>
                   </a:tcPr>
                 </a:tc>
@@ -5875,8 +6013,8 @@
         </p:nvSpPr>
         <p:spPr>
           <a:xfrm>
-            <a:off x="640080" y="5486400"/>
-            <a:ext cx="10972800" cy="914400"/>
+            <a:off x="8229600" y="1280160"/>
+            <a:ext cx="3657600" cy="4572000"/>
           </a:xfrm>
           <a:prstGeom prst="rect">
             <a:avLst/>
@@ -5891,13 +6029,24 @@
           <a:p>
             <a:pPr algn="l"/>
             <a:r>
-              <a:rPr sz="1400" b="0">
+              <a:rPr sz="1200" b="0">
                 <a:solidFill>
                   <a:srgbClr val="1A1A1A"/>
                 </a:solidFill>
                 <a:latin typeface="Calibri"/>
               </a:rPr>
-              <a:t>ALWAYS-WORKS 6-judge subset (≥95% on both): Anthropic + OpenAI + Qwen + Gemma. The 2 cheapest open-weight judges make this subset. Gemini fails on TREC RAG (web content) more than on BEIR (scientific abstracts) — reliability is content-domain dependent.</a:t>
+              <a:t>Three corpora, three κ
+• ISU DSpace: within-pair max 0.80
+  (no human gold available)
+• TREC RAG 2024: 9-judge κ = 0.4941
+  (web passages, MS MARCO v2.1)
+• BEIR scifact: precision 63.7%
+  (κ undefined — all-positive qrels)
+• TREC-COVID: frontier-7 κ = 0.4462
+  (biomedical scientific)
+All three public-corpus ensembles
+in the moderate Landis-Koch band.
+Robustness across content domains.</a:t>
             </a:r>
           </a:p>
         </p:txBody>
@@ -5967,7 +6116,7 @@
                 </a:solidFill>
                 <a:latin typeface="Calibri"/>
               </a:rPr>
-              <a:t>13/15</a:t>
+              <a:t>13/16</a:t>
             </a:r>
           </a:p>
         </p:txBody>
@@ -6020,21 +6169,989 @@
                 </a:solidFill>
                 <a:latin typeface="Calibri"/>
               </a:rPr>
-              <a:t>Takeaway</a:t>
-            </a:r>
-          </a:p>
-        </p:txBody>
-      </p:sp>
-      <p:sp>
-        <p:nvSpPr>
-          <p:cNvPr id="3" name="TextBox 2"/>
+              <a:t>Coverage divergence — content-domain reliability axis</a:t>
+            </a:r>
+          </a:p>
+        </p:txBody>
+      </p:sp>
+      <p:graphicFrame>
+        <p:nvGraphicFramePr>
+          <p:cNvPr id="3" name="Table 2"/>
+          <p:cNvGraphicFramePr>
+            <a:graphicFrameLocks noGrp="1"/>
+          </p:cNvGraphicFramePr>
+          <p:nvPr/>
+        </p:nvGraphicFramePr>
+        <p:xfrm>
+          <a:off x="457200" y="1371600"/>
+          <a:ext cx="9326880" cy="3108960"/>
+        </p:xfrm>
+        <a:graphic>
+          <a:graphicData uri="http://schemas.openxmlformats.org/drawingml/2006/table">
+            <a:tbl>
+              <a:tblPr firstRow="1" bandRow="1">
+                <a:tableStyleId>{5C22544A-7EE6-4342-B048-85BDC9FD1C3A}</a:tableStyleId>
+              </a:tblPr>
+              <a:tblGrid>
+                <a:gridCol w="2743200"/>
+                <a:gridCol w="2194560"/>
+                <a:gridCol w="2194560"/>
+                <a:gridCol w="2194560"/>
+              </a:tblGrid>
+              <a:tr h="310896">
+                <a:tc>
+                  <a:txBody>
+                    <a:bodyPr wrap="square"/>
+                    <a:lstStyle/>
+                    <a:p>
+                      <a:pPr algn="l"/>
+                      <a:r>
+                        <a:rPr sz="1300" b="1">
+                          <a:solidFill>
+                            <a:srgbClr val="FFFFFF"/>
+                          </a:solidFill>
+                          <a:latin typeface="Calibri"/>
+                        </a:rPr>
+                        <a:t>Judge</a:t>
+                      </a:r>
+                    </a:p>
+                  </a:txBody>
+                  <a:tcPr marL="73152" marR="73152" marT="36576" marB="36576">
+                    <a:solidFill>
+                      <a:srgbClr val="0E4A86"/>
+                    </a:solidFill>
+                  </a:tcPr>
+                </a:tc>
+                <a:tc>
+                  <a:txBody>
+                    <a:bodyPr wrap="square"/>
+                    <a:lstStyle/>
+                    <a:p>
+                      <a:pPr algn="r"/>
+                      <a:r>
+                        <a:rPr sz="1300" b="1">
+                          <a:solidFill>
+                            <a:srgbClr val="FFFFFF"/>
+                          </a:solidFill>
+                          <a:latin typeface="Calibri"/>
+                        </a:rPr>
+                        <a:t>TREC RAG 2024 (n=537)</a:t>
+                      </a:r>
+                    </a:p>
+                  </a:txBody>
+                  <a:tcPr marL="73152" marR="73152" marT="36576" marB="36576">
+                    <a:solidFill>
+                      <a:srgbClr val="0E4A86"/>
+                    </a:solidFill>
+                  </a:tcPr>
+                </a:tc>
+                <a:tc>
+                  <a:txBody>
+                    <a:bodyPr wrap="square"/>
+                    <a:lstStyle/>
+                    <a:p>
+                      <a:pPr algn="r"/>
+                      <a:r>
+                        <a:rPr sz="1300" b="1">
+                          <a:solidFill>
+                            <a:srgbClr val="FFFFFF"/>
+                          </a:solidFill>
+                          <a:latin typeface="Calibri"/>
+                        </a:rPr>
+                        <a:t>BEIR scifact (n=300)</a:t>
+                      </a:r>
+                    </a:p>
+                  </a:txBody>
+                  <a:tcPr marL="73152" marR="73152" marT="36576" marB="36576">
+                    <a:solidFill>
+                      <a:srgbClr val="0E4A86"/>
+                    </a:solidFill>
+                  </a:tcPr>
+                </a:tc>
+                <a:tc>
+                  <a:txBody>
+                    <a:bodyPr wrap="square"/>
+                    <a:lstStyle/>
+                    <a:p>
+                      <a:pPr algn="r"/>
+                      <a:r>
+                        <a:rPr sz="1300" b="1">
+                          <a:solidFill>
+                            <a:srgbClr val="FFFFFF"/>
+                          </a:solidFill>
+                          <a:latin typeface="Calibri"/>
+                        </a:rPr>
+                        <a:t>TREC-COVID (n=300)</a:t>
+                      </a:r>
+                    </a:p>
+                  </a:txBody>
+                  <a:tcPr marL="73152" marR="73152" marT="36576" marB="36576">
+                    <a:solidFill>
+                      <a:srgbClr val="0E4A86"/>
+                    </a:solidFill>
+                  </a:tcPr>
+                </a:tc>
+              </a:tr>
+              <a:tr h="310896">
+                <a:tc>
+                  <a:txBody>
+                    <a:bodyPr wrap="square"/>
+                    <a:lstStyle/>
+                    <a:p>
+                      <a:pPr algn="l"/>
+                      <a:r>
+                        <a:rPr sz="1300">
+                          <a:solidFill>
+                            <a:srgbClr val="1A1A1A"/>
+                          </a:solidFill>
+                          <a:latin typeface="Calibri"/>
+                        </a:rPr>
+                        <a:t>GPT-5.5 (reasoning=low)</a:t>
+                      </a:r>
+                    </a:p>
+                  </a:txBody>
+                  <a:tcPr marL="73152" marR="73152" marT="36576" marB="36576">
+                    <a:solidFill>
+                      <a:srgbClr val="FFFFFF"/>
+                    </a:solidFill>
+                  </a:tcPr>
+                </a:tc>
+                <a:tc>
+                  <a:txBody>
+                    <a:bodyPr wrap="square"/>
+                    <a:lstStyle/>
+                    <a:p>
+                      <a:pPr algn="r"/>
+                      <a:r>
+                        <a:rPr sz="1300">
+                          <a:solidFill>
+                            <a:srgbClr val="1A1A1A"/>
+                          </a:solidFill>
+                          <a:latin typeface="Calibri"/>
+                        </a:rPr>
+                        <a:t>100%</a:t>
+                      </a:r>
+                    </a:p>
+                  </a:txBody>
+                  <a:tcPr marL="73152" marR="73152" marT="36576" marB="36576">
+                    <a:solidFill>
+                      <a:srgbClr val="FFFFFF"/>
+                    </a:solidFill>
+                  </a:tcPr>
+                </a:tc>
+                <a:tc>
+                  <a:txBody>
+                    <a:bodyPr wrap="square"/>
+                    <a:lstStyle/>
+                    <a:p>
+                      <a:pPr algn="r"/>
+                      <a:r>
+                        <a:rPr sz="1300">
+                          <a:solidFill>
+                            <a:srgbClr val="1A1A1A"/>
+                          </a:solidFill>
+                          <a:latin typeface="Calibri"/>
+                        </a:rPr>
+                        <a:t>100%</a:t>
+                      </a:r>
+                    </a:p>
+                  </a:txBody>
+                  <a:tcPr marL="73152" marR="73152" marT="36576" marB="36576">
+                    <a:solidFill>
+                      <a:srgbClr val="FFFFFF"/>
+                    </a:solidFill>
+                  </a:tcPr>
+                </a:tc>
+                <a:tc>
+                  <a:txBody>
+                    <a:bodyPr wrap="square"/>
+                    <a:lstStyle/>
+                    <a:p>
+                      <a:pPr algn="r"/>
+                      <a:r>
+                        <a:rPr sz="1300">
+                          <a:solidFill>
+                            <a:srgbClr val="1A1A1A"/>
+                          </a:solidFill>
+                          <a:latin typeface="Calibri"/>
+                        </a:rPr>
+                        <a:t>100%</a:t>
+                      </a:r>
+                    </a:p>
+                  </a:txBody>
+                  <a:tcPr marL="73152" marR="73152" marT="36576" marB="36576">
+                    <a:solidFill>
+                      <a:srgbClr val="FFFFFF"/>
+                    </a:solidFill>
+                  </a:tcPr>
+                </a:tc>
+              </a:tr>
+              <a:tr h="310896">
+                <a:tc>
+                  <a:txBody>
+                    <a:bodyPr wrap="square"/>
+                    <a:lstStyle/>
+                    <a:p>
+                      <a:pPr algn="l"/>
+                      <a:r>
+                        <a:rPr sz="1300">
+                          <a:solidFill>
+                            <a:srgbClr val="1A1A1A"/>
+                          </a:solidFill>
+                          <a:latin typeface="Calibri"/>
+                        </a:rPr>
+                        <a:t>GPT-4o</a:t>
+                      </a:r>
+                    </a:p>
+                  </a:txBody>
+                  <a:tcPr marL="73152" marR="73152" marT="36576" marB="36576">
+                    <a:solidFill>
+                      <a:srgbClr val="F5F5F5"/>
+                    </a:solidFill>
+                  </a:tcPr>
+                </a:tc>
+                <a:tc>
+                  <a:txBody>
+                    <a:bodyPr wrap="square"/>
+                    <a:lstStyle/>
+                    <a:p>
+                      <a:pPr algn="r"/>
+                      <a:r>
+                        <a:rPr sz="1300">
+                          <a:solidFill>
+                            <a:srgbClr val="1A1A1A"/>
+                          </a:solidFill>
+                          <a:latin typeface="Calibri"/>
+                        </a:rPr>
+                        <a:t>100%</a:t>
+                      </a:r>
+                    </a:p>
+                  </a:txBody>
+                  <a:tcPr marL="73152" marR="73152" marT="36576" marB="36576">
+                    <a:solidFill>
+                      <a:srgbClr val="F5F5F5"/>
+                    </a:solidFill>
+                  </a:tcPr>
+                </a:tc>
+                <a:tc>
+                  <a:txBody>
+                    <a:bodyPr wrap="square"/>
+                    <a:lstStyle/>
+                    <a:p>
+                      <a:pPr algn="r"/>
+                      <a:r>
+                        <a:rPr sz="1300">
+                          <a:solidFill>
+                            <a:srgbClr val="1A1A1A"/>
+                          </a:solidFill>
+                          <a:latin typeface="Calibri"/>
+                        </a:rPr>
+                        <a:t>100%</a:t>
+                      </a:r>
+                    </a:p>
+                  </a:txBody>
+                  <a:tcPr marL="73152" marR="73152" marT="36576" marB="36576">
+                    <a:solidFill>
+                      <a:srgbClr val="F5F5F5"/>
+                    </a:solidFill>
+                  </a:tcPr>
+                </a:tc>
+                <a:tc>
+                  <a:txBody>
+                    <a:bodyPr wrap="square"/>
+                    <a:lstStyle/>
+                    <a:p>
+                      <a:pPr algn="r"/>
+                      <a:r>
+                        <a:rPr sz="1300">
+                          <a:solidFill>
+                            <a:srgbClr val="1A1A1A"/>
+                          </a:solidFill>
+                          <a:latin typeface="Calibri"/>
+                        </a:rPr>
+                        <a:t>100%</a:t>
+                      </a:r>
+                    </a:p>
+                  </a:txBody>
+                  <a:tcPr marL="73152" marR="73152" marT="36576" marB="36576">
+                    <a:solidFill>
+                      <a:srgbClr val="F5F5F5"/>
+                    </a:solidFill>
+                  </a:tcPr>
+                </a:tc>
+              </a:tr>
+              <a:tr h="310896">
+                <a:tc>
+                  <a:txBody>
+                    <a:bodyPr wrap="square"/>
+                    <a:lstStyle/>
+                    <a:p>
+                      <a:pPr algn="l"/>
+                      <a:r>
+                        <a:rPr sz="1300">
+                          <a:solidFill>
+                            <a:srgbClr val="1A1A1A"/>
+                          </a:solidFill>
+                          <a:latin typeface="Calibri"/>
+                        </a:rPr>
+                        <a:t>Claude Opus 4.7</a:t>
+                      </a:r>
+                    </a:p>
+                  </a:txBody>
+                  <a:tcPr marL="73152" marR="73152" marT="36576" marB="36576">
+                    <a:solidFill>
+                      <a:srgbClr val="FFFFFF"/>
+                    </a:solidFill>
+                  </a:tcPr>
+                </a:tc>
+                <a:tc>
+                  <a:txBody>
+                    <a:bodyPr wrap="square"/>
+                    <a:lstStyle/>
+                    <a:p>
+                      <a:pPr algn="r"/>
+                      <a:r>
+                        <a:rPr sz="1300">
+                          <a:solidFill>
+                            <a:srgbClr val="1A1A1A"/>
+                          </a:solidFill>
+                          <a:latin typeface="Calibri"/>
+                        </a:rPr>
+                        <a:t>100%</a:t>
+                      </a:r>
+                    </a:p>
+                  </a:txBody>
+                  <a:tcPr marL="73152" marR="73152" marT="36576" marB="36576">
+                    <a:solidFill>
+                      <a:srgbClr val="FFFFFF"/>
+                    </a:solidFill>
+                  </a:tcPr>
+                </a:tc>
+                <a:tc>
+                  <a:txBody>
+                    <a:bodyPr wrap="square"/>
+                    <a:lstStyle/>
+                    <a:p>
+                      <a:pPr algn="r"/>
+                      <a:r>
+                        <a:rPr sz="1300">
+                          <a:solidFill>
+                            <a:srgbClr val="1A1A1A"/>
+                          </a:solidFill>
+                          <a:latin typeface="Calibri"/>
+                        </a:rPr>
+                        <a:t>95%</a:t>
+                      </a:r>
+                    </a:p>
+                  </a:txBody>
+                  <a:tcPr marL="73152" marR="73152" marT="36576" marB="36576">
+                    <a:solidFill>
+                      <a:srgbClr val="FFFFFF"/>
+                    </a:solidFill>
+                  </a:tcPr>
+                </a:tc>
+                <a:tc>
+                  <a:txBody>
+                    <a:bodyPr wrap="square"/>
+                    <a:lstStyle/>
+                    <a:p>
+                      <a:pPr algn="r"/>
+                      <a:r>
+                        <a:rPr sz="1300">
+                          <a:solidFill>
+                            <a:srgbClr val="1A1A1A"/>
+                          </a:solidFill>
+                          <a:latin typeface="Calibri"/>
+                        </a:rPr>
+                        <a:t>84%</a:t>
+                      </a:r>
+                    </a:p>
+                  </a:txBody>
+                  <a:tcPr marL="73152" marR="73152" marT="36576" marB="36576">
+                    <a:solidFill>
+                      <a:srgbClr val="FFFFFF"/>
+                    </a:solidFill>
+                  </a:tcPr>
+                </a:tc>
+              </a:tr>
+              <a:tr h="310896">
+                <a:tc>
+                  <a:txBody>
+                    <a:bodyPr wrap="square"/>
+                    <a:lstStyle/>
+                    <a:p>
+                      <a:pPr algn="l"/>
+                      <a:r>
+                        <a:rPr sz="1300">
+                          <a:solidFill>
+                            <a:srgbClr val="1A1A1A"/>
+                          </a:solidFill>
+                          <a:latin typeface="Calibri"/>
+                        </a:rPr>
+                        <a:t>Claude Sonnet 4.6</a:t>
+                      </a:r>
+                    </a:p>
+                  </a:txBody>
+                  <a:tcPr marL="73152" marR="73152" marT="36576" marB="36576">
+                    <a:solidFill>
+                      <a:srgbClr val="F5F5F5"/>
+                    </a:solidFill>
+                  </a:tcPr>
+                </a:tc>
+                <a:tc>
+                  <a:txBody>
+                    <a:bodyPr wrap="square"/>
+                    <a:lstStyle/>
+                    <a:p>
+                      <a:pPr algn="r"/>
+                      <a:r>
+                        <a:rPr sz="1300">
+                          <a:solidFill>
+                            <a:srgbClr val="1A1A1A"/>
+                          </a:solidFill>
+                          <a:latin typeface="Calibri"/>
+                        </a:rPr>
+                        <a:t>100%</a:t>
+                      </a:r>
+                    </a:p>
+                  </a:txBody>
+                  <a:tcPr marL="73152" marR="73152" marT="36576" marB="36576">
+                    <a:solidFill>
+                      <a:srgbClr val="F5F5F5"/>
+                    </a:solidFill>
+                  </a:tcPr>
+                </a:tc>
+                <a:tc>
+                  <a:txBody>
+                    <a:bodyPr wrap="square"/>
+                    <a:lstStyle/>
+                    <a:p>
+                      <a:pPr algn="r"/>
+                      <a:r>
+                        <a:rPr sz="1300">
+                          <a:solidFill>
+                            <a:srgbClr val="1A1A1A"/>
+                          </a:solidFill>
+                          <a:latin typeface="Calibri"/>
+                        </a:rPr>
+                        <a:t>99.7%</a:t>
+                      </a:r>
+                    </a:p>
+                  </a:txBody>
+                  <a:tcPr marL="73152" marR="73152" marT="36576" marB="36576">
+                    <a:solidFill>
+                      <a:srgbClr val="F5F5F5"/>
+                    </a:solidFill>
+                  </a:tcPr>
+                </a:tc>
+                <a:tc>
+                  <a:txBody>
+                    <a:bodyPr wrap="square"/>
+                    <a:lstStyle/>
+                    <a:p>
+                      <a:pPr algn="r"/>
+                      <a:r>
+                        <a:rPr sz="1300">
+                          <a:solidFill>
+                            <a:srgbClr val="1A1A1A"/>
+                          </a:solidFill>
+                          <a:latin typeface="Calibri"/>
+                        </a:rPr>
+                        <a:t>100%</a:t>
+                      </a:r>
+                    </a:p>
+                  </a:txBody>
+                  <a:tcPr marL="73152" marR="73152" marT="36576" marB="36576">
+                    <a:solidFill>
+                      <a:srgbClr val="F5F5F5"/>
+                    </a:solidFill>
+                  </a:tcPr>
+                </a:tc>
+              </a:tr>
+              <a:tr h="310896">
+                <a:tc>
+                  <a:txBody>
+                    <a:bodyPr wrap="square"/>
+                    <a:lstStyle/>
+                    <a:p>
+                      <a:pPr algn="l"/>
+                      <a:r>
+                        <a:rPr sz="1300">
+                          <a:solidFill>
+                            <a:srgbClr val="1A1A1A"/>
+                          </a:solidFill>
+                          <a:latin typeface="Calibri"/>
+                        </a:rPr>
+                        <a:t>Qwen 3.6 Plus</a:t>
+                      </a:r>
+                    </a:p>
+                  </a:txBody>
+                  <a:tcPr marL="73152" marR="73152" marT="36576" marB="36576">
+                    <a:solidFill>
+                      <a:srgbClr val="FFFFFF"/>
+                    </a:solidFill>
+                  </a:tcPr>
+                </a:tc>
+                <a:tc>
+                  <a:txBody>
+                    <a:bodyPr wrap="square"/>
+                    <a:lstStyle/>
+                    <a:p>
+                      <a:pPr algn="r"/>
+                      <a:r>
+                        <a:rPr sz="1300">
+                          <a:solidFill>
+                            <a:srgbClr val="1A1A1A"/>
+                          </a:solidFill>
+                          <a:latin typeface="Calibri"/>
+                        </a:rPr>
+                        <a:t>100%</a:t>
+                      </a:r>
+                    </a:p>
+                  </a:txBody>
+                  <a:tcPr marL="73152" marR="73152" marT="36576" marB="36576">
+                    <a:solidFill>
+                      <a:srgbClr val="FFFFFF"/>
+                    </a:solidFill>
+                  </a:tcPr>
+                </a:tc>
+                <a:tc>
+                  <a:txBody>
+                    <a:bodyPr wrap="square"/>
+                    <a:lstStyle/>
+                    <a:p>
+                      <a:pPr algn="r"/>
+                      <a:r>
+                        <a:rPr sz="1300">
+                          <a:solidFill>
+                            <a:srgbClr val="1A1A1A"/>
+                          </a:solidFill>
+                          <a:latin typeface="Calibri"/>
+                        </a:rPr>
+                        <a:t>100%</a:t>
+                      </a:r>
+                    </a:p>
+                  </a:txBody>
+                  <a:tcPr marL="73152" marR="73152" marT="36576" marB="36576">
+                    <a:solidFill>
+                      <a:srgbClr val="FFFFFF"/>
+                    </a:solidFill>
+                  </a:tcPr>
+                </a:tc>
+                <a:tc>
+                  <a:txBody>
+                    <a:bodyPr wrap="square"/>
+                    <a:lstStyle/>
+                    <a:p>
+                      <a:pPr algn="r"/>
+                      <a:r>
+                        <a:rPr sz="1300">
+                          <a:solidFill>
+                            <a:srgbClr val="1A1A1A"/>
+                          </a:solidFill>
+                          <a:latin typeface="Calibri"/>
+                        </a:rPr>
+                        <a:t>—</a:t>
+                      </a:r>
+                    </a:p>
+                  </a:txBody>
+                  <a:tcPr marL="73152" marR="73152" marT="36576" marB="36576">
+                    <a:solidFill>
+                      <a:srgbClr val="FFFFFF"/>
+                    </a:solidFill>
+                  </a:tcPr>
+                </a:tc>
+              </a:tr>
+              <a:tr h="310896">
+                <a:tc>
+                  <a:txBody>
+                    <a:bodyPr wrap="square"/>
+                    <a:lstStyle/>
+                    <a:p>
+                      <a:pPr algn="l"/>
+                      <a:r>
+                        <a:rPr sz="1300">
+                          <a:solidFill>
+                            <a:srgbClr val="1A1A1A"/>
+                          </a:solidFill>
+                          <a:latin typeface="Calibri"/>
+                        </a:rPr>
+                        <a:t>Gemma 4 26B</a:t>
+                      </a:r>
+                    </a:p>
+                  </a:txBody>
+                  <a:tcPr marL="73152" marR="73152" marT="36576" marB="36576">
+                    <a:solidFill>
+                      <a:srgbClr val="F5F5F5"/>
+                    </a:solidFill>
+                  </a:tcPr>
+                </a:tc>
+                <a:tc>
+                  <a:txBody>
+                    <a:bodyPr wrap="square"/>
+                    <a:lstStyle/>
+                    <a:p>
+                      <a:pPr algn="r"/>
+                      <a:r>
+                        <a:rPr sz="1300">
+                          <a:solidFill>
+                            <a:srgbClr val="1A1A1A"/>
+                          </a:solidFill>
+                          <a:latin typeface="Calibri"/>
+                        </a:rPr>
+                        <a:t>100%</a:t>
+                      </a:r>
+                    </a:p>
+                  </a:txBody>
+                  <a:tcPr marL="73152" marR="73152" marT="36576" marB="36576">
+                    <a:solidFill>
+                      <a:srgbClr val="F5F5F5"/>
+                    </a:solidFill>
+                  </a:tcPr>
+                </a:tc>
+                <a:tc>
+                  <a:txBody>
+                    <a:bodyPr wrap="square"/>
+                    <a:lstStyle/>
+                    <a:p>
+                      <a:pPr algn="r"/>
+                      <a:r>
+                        <a:rPr sz="1300">
+                          <a:solidFill>
+                            <a:srgbClr val="1A1A1A"/>
+                          </a:solidFill>
+                          <a:latin typeface="Calibri"/>
+                        </a:rPr>
+                        <a:t>100%</a:t>
+                      </a:r>
+                    </a:p>
+                  </a:txBody>
+                  <a:tcPr marL="73152" marR="73152" marT="36576" marB="36576">
+                    <a:solidFill>
+                      <a:srgbClr val="F5F5F5"/>
+                    </a:solidFill>
+                  </a:tcPr>
+                </a:tc>
+                <a:tc>
+                  <a:txBody>
+                    <a:bodyPr wrap="square"/>
+                    <a:lstStyle/>
+                    <a:p>
+                      <a:pPr algn="r"/>
+                      <a:r>
+                        <a:rPr sz="1300">
+                          <a:solidFill>
+                            <a:srgbClr val="1A1A1A"/>
+                          </a:solidFill>
+                          <a:latin typeface="Calibri"/>
+                        </a:rPr>
+                        <a:t>—</a:t>
+                      </a:r>
+                    </a:p>
+                  </a:txBody>
+                  <a:tcPr marL="73152" marR="73152" marT="36576" marB="36576">
+                    <a:solidFill>
+                      <a:srgbClr val="F5F5F5"/>
+                    </a:solidFill>
+                  </a:tcPr>
+                </a:tc>
+              </a:tr>
+              <a:tr h="310896">
+                <a:tc>
+                  <a:txBody>
+                    <a:bodyPr wrap="square"/>
+                    <a:lstStyle/>
+                    <a:p>
+                      <a:pPr algn="l"/>
+                      <a:r>
+                        <a:rPr sz="1300">
+                          <a:solidFill>
+                            <a:srgbClr val="1A1A1A"/>
+                          </a:solidFill>
+                          <a:latin typeface="Calibri"/>
+                        </a:rPr>
+                        <a:t>DeepSeek V4 Pro</a:t>
+                      </a:r>
+                    </a:p>
+                  </a:txBody>
+                  <a:tcPr marL="73152" marR="73152" marT="36576" marB="36576">
+                    <a:solidFill>
+                      <a:srgbClr val="FFFFFF"/>
+                    </a:solidFill>
+                  </a:tcPr>
+                </a:tc>
+                <a:tc>
+                  <a:txBody>
+                    <a:bodyPr wrap="square"/>
+                    <a:lstStyle/>
+                    <a:p>
+                      <a:pPr algn="r"/>
+                      <a:r>
+                        <a:rPr sz="1300">
+                          <a:solidFill>
+                            <a:srgbClr val="1A1A1A"/>
+                          </a:solidFill>
+                          <a:latin typeface="Calibri"/>
+                        </a:rPr>
+                        <a:t>39%</a:t>
+                      </a:r>
+                    </a:p>
+                  </a:txBody>
+                  <a:tcPr marL="73152" marR="73152" marT="36576" marB="36576">
+                    <a:solidFill>
+                      <a:srgbClr val="FFFFFF"/>
+                    </a:solidFill>
+                  </a:tcPr>
+                </a:tc>
+                <a:tc>
+                  <a:txBody>
+                    <a:bodyPr wrap="square"/>
+                    <a:lstStyle/>
+                    <a:p>
+                      <a:pPr algn="r"/>
+                      <a:r>
+                        <a:rPr sz="1300">
+                          <a:solidFill>
+                            <a:srgbClr val="1A1A1A"/>
+                          </a:solidFill>
+                          <a:latin typeface="Calibri"/>
+                        </a:rPr>
+                        <a:t>84%</a:t>
+                      </a:r>
+                    </a:p>
+                  </a:txBody>
+                  <a:tcPr marL="73152" marR="73152" marT="36576" marB="36576">
+                    <a:solidFill>
+                      <a:srgbClr val="FFFFFF"/>
+                    </a:solidFill>
+                  </a:tcPr>
+                </a:tc>
+                <a:tc>
+                  <a:txBody>
+                    <a:bodyPr wrap="square"/>
+                    <a:lstStyle/>
+                    <a:p>
+                      <a:pPr algn="r"/>
+                      <a:r>
+                        <a:rPr sz="1300">
+                          <a:solidFill>
+                            <a:srgbClr val="1A1A1A"/>
+                          </a:solidFill>
+                          <a:latin typeface="Calibri"/>
+                        </a:rPr>
+                        <a:t>83%</a:t>
+                      </a:r>
+                    </a:p>
+                  </a:txBody>
+                  <a:tcPr marL="73152" marR="73152" marT="36576" marB="36576">
+                    <a:solidFill>
+                      <a:srgbClr val="FFFFFF"/>
+                    </a:solidFill>
+                  </a:tcPr>
+                </a:tc>
+              </a:tr>
+              <a:tr h="310896">
+                <a:tc>
+                  <a:txBody>
+                    <a:bodyPr wrap="square"/>
+                    <a:lstStyle/>
+                    <a:p>
+                      <a:pPr algn="l"/>
+                      <a:r>
+                        <a:rPr sz="1300">
+                          <a:solidFill>
+                            <a:srgbClr val="1A1A1A"/>
+                          </a:solidFill>
+                          <a:latin typeface="Calibri"/>
+                        </a:rPr>
+                        <a:t>Gemini 3.1 Pro Preview</a:t>
+                      </a:r>
+                    </a:p>
+                  </a:txBody>
+                  <a:tcPr marL="73152" marR="73152" marT="36576" marB="36576">
+                    <a:solidFill>
+                      <a:srgbClr val="F5F5F5"/>
+                    </a:solidFill>
+                  </a:tcPr>
+                </a:tc>
+                <a:tc>
+                  <a:txBody>
+                    <a:bodyPr wrap="square"/>
+                    <a:lstStyle/>
+                    <a:p>
+                      <a:pPr algn="r"/>
+                      <a:r>
+                        <a:rPr sz="1300">
+                          <a:solidFill>
+                            <a:srgbClr val="1A1A1A"/>
+                          </a:solidFill>
+                          <a:latin typeface="Calibri"/>
+                        </a:rPr>
+                        <a:t>24%</a:t>
+                      </a:r>
+                    </a:p>
+                  </a:txBody>
+                  <a:tcPr marL="73152" marR="73152" marT="36576" marB="36576">
+                    <a:solidFill>
+                      <a:srgbClr val="F5F5F5"/>
+                    </a:solidFill>
+                  </a:tcPr>
+                </a:tc>
+                <a:tc>
+                  <a:txBody>
+                    <a:bodyPr wrap="square"/>
+                    <a:lstStyle/>
+                    <a:p>
+                      <a:pPr algn="r"/>
+                      <a:r>
+                        <a:rPr sz="1300">
+                          <a:solidFill>
+                            <a:srgbClr val="1A1A1A"/>
+                          </a:solidFill>
+                          <a:latin typeface="Calibri"/>
+                        </a:rPr>
+                        <a:t>60%</a:t>
+                      </a:r>
+                    </a:p>
+                  </a:txBody>
+                  <a:tcPr marL="73152" marR="73152" marT="36576" marB="36576">
+                    <a:solidFill>
+                      <a:srgbClr val="F5F5F5"/>
+                    </a:solidFill>
+                  </a:tcPr>
+                </a:tc>
+                <a:tc>
+                  <a:txBody>
+                    <a:bodyPr wrap="square"/>
+                    <a:lstStyle/>
+                    <a:p>
+                      <a:pPr algn="r"/>
+                      <a:r>
+                        <a:rPr sz="1300">
+                          <a:solidFill>
+                            <a:srgbClr val="1A1A1A"/>
+                          </a:solidFill>
+                          <a:latin typeface="Calibri"/>
+                        </a:rPr>
+                        <a:t>44%</a:t>
+                      </a:r>
+                    </a:p>
+                  </a:txBody>
+                  <a:tcPr marL="73152" marR="73152" marT="36576" marB="36576">
+                    <a:solidFill>
+                      <a:srgbClr val="F5F5F5"/>
+                    </a:solidFill>
+                  </a:tcPr>
+                </a:tc>
+              </a:tr>
+              <a:tr h="310896">
+                <a:tc>
+                  <a:txBody>
+                    <a:bodyPr wrap="square"/>
+                    <a:lstStyle/>
+                    <a:p>
+                      <a:pPr algn="l"/>
+                      <a:r>
+                        <a:rPr sz="1300">
+                          <a:solidFill>
+                            <a:srgbClr val="1A1A1A"/>
+                          </a:solidFill>
+                          <a:latin typeface="Calibri"/>
+                        </a:rPr>
+                        <a:t>Gemini 2.5 Pro</a:t>
+                      </a:r>
+                    </a:p>
+                  </a:txBody>
+                  <a:tcPr marL="73152" marR="73152" marT="36576" marB="36576">
+                    <a:solidFill>
+                      <a:srgbClr val="FFFFFF"/>
+                    </a:solidFill>
+                  </a:tcPr>
+                </a:tc>
+                <a:tc>
+                  <a:txBody>
+                    <a:bodyPr wrap="square"/>
+                    <a:lstStyle/>
+                    <a:p>
+                      <a:pPr algn="r"/>
+                      <a:r>
+                        <a:rPr sz="1300">
+                          <a:solidFill>
+                            <a:srgbClr val="1A1A1A"/>
+                          </a:solidFill>
+                          <a:latin typeface="Calibri"/>
+                        </a:rPr>
+                        <a:t>17%</a:t>
+                      </a:r>
+                    </a:p>
+                  </a:txBody>
+                  <a:tcPr marL="73152" marR="73152" marT="36576" marB="36576">
+                    <a:solidFill>
+                      <a:srgbClr val="FFFFFF"/>
+                    </a:solidFill>
+                  </a:tcPr>
+                </a:tc>
+                <a:tc>
+                  <a:txBody>
+                    <a:bodyPr wrap="square"/>
+                    <a:lstStyle/>
+                    <a:p>
+                      <a:pPr algn="r"/>
+                      <a:r>
+                        <a:rPr sz="1300">
+                          <a:solidFill>
+                            <a:srgbClr val="1A1A1A"/>
+                          </a:solidFill>
+                          <a:latin typeface="Calibri"/>
+                        </a:rPr>
+                        <a:t>86%</a:t>
+                      </a:r>
+                    </a:p>
+                  </a:txBody>
+                  <a:tcPr marL="73152" marR="73152" marT="36576" marB="36576">
+                    <a:solidFill>
+                      <a:srgbClr val="FFFFFF"/>
+                    </a:solidFill>
+                  </a:tcPr>
+                </a:tc>
+                <a:tc>
+                  <a:txBody>
+                    <a:bodyPr wrap="square"/>
+                    <a:lstStyle/>
+                    <a:p>
+                      <a:pPr algn="r"/>
+                      <a:r>
+                        <a:rPr sz="1300">
+                          <a:solidFill>
+                            <a:srgbClr val="1A1A1A"/>
+                          </a:solidFill>
+                          <a:latin typeface="Calibri"/>
+                        </a:rPr>
+                        <a:t>6%</a:t>
+                      </a:r>
+                    </a:p>
+                  </a:txBody>
+                  <a:tcPr marL="73152" marR="73152" marT="36576" marB="36576">
+                    <a:solidFill>
+                      <a:srgbClr val="FFFFFF"/>
+                    </a:solidFill>
+                  </a:tcPr>
+                </a:tc>
+              </a:tr>
+            </a:tbl>
+          </a:graphicData>
+        </a:graphic>
+      </p:graphicFrame>
+      <p:sp>
+        <p:nvSpPr>
+          <p:cNvPr id="4" name="TextBox 3"/>
           <p:cNvSpPr txBox="1"/>
           <p:nvPr/>
         </p:nvSpPr>
         <p:spPr>
           <a:xfrm>
-            <a:off x="640080" y="1280160"/>
-            <a:ext cx="11430000" cy="4572000"/>
+            <a:off x="457200" y="5669280"/>
+            <a:ext cx="10972800" cy="914400"/>
           </a:xfrm>
           <a:prstGeom prst="rect">
             <a:avLst/>
@@ -6042,95 +7159,27 @@
           <a:noFill/>
         </p:spPr>
         <p:txBody>
-          <a:bodyPr wrap="square">
+          <a:bodyPr wrap="square" anchor="t">
             <a:spAutoFit/>
           </a:bodyPr>
           <a:lstStyle/>
           <a:p>
-            <a:pPr>
-              <a:lnSpc>
-                <a:spcPct val="135000"/>
-              </a:lnSpc>
-            </a:pPr>
-            <a:r>
-              <a:rPr sz="1800" b="1">
+            <a:pPr algn="l"/>
+            <a:r>
+              <a:rPr sz="1300" b="0">
                 <a:solidFill>
                   <a:srgbClr val="1A1A1A"/>
                 </a:solidFill>
                 <a:latin typeface="Calibri"/>
               </a:rPr>
-              <a:t>• CALIBRATION PHILOSOPHY (lenient vs strict score-allocation pattern), NOT provider lineage, is the axis on which retrieval verdicts shift</a:t>
-            </a:r>
-          </a:p>
-          <a:p>
-            <a:pPr>
-              <a:lnSpc>
-                <a:spcPct val="135000"/>
-              </a:lnSpc>
-            </a:pPr>
-            <a:r>
-              <a:rPr sz="1800" b="0">
-                <a:solidFill>
-                  <a:srgbClr val="1A1A1A"/>
-                </a:solidFill>
-                <a:latin typeface="Calibri"/>
-              </a:rPr>
-              <a:t>• Cross-family agreement (κ ≥ 0.75) is high enough that judge interchangeability is a defensible default for reasoning-capable commercial judges</a:t>
-            </a:r>
-          </a:p>
-          <a:p>
-            <a:pPr>
-              <a:lnSpc>
-                <a:spcPct val="135000"/>
-              </a:lnSpc>
-            </a:pPr>
-            <a:r>
-              <a:rPr sz="1800" b="1">
-                <a:solidFill>
-                  <a:srgbClr val="1A1A1A"/>
-                </a:solidFill>
-                <a:latin typeface="Calibri"/>
-              </a:rPr>
-              <a:t>• Cross-organization open-weight ensemble (Qwen + Gemma 4) achieves matrix-highest κ at ~1% commercial cost — sovereign-cloud / on-prem deployments are NOT condemned to lower-quality judging</a:t>
-            </a:r>
-          </a:p>
-          <a:p>
-            <a:pPr>
-              <a:lnSpc>
-                <a:spcPct val="135000"/>
-              </a:lnSpc>
-            </a:pPr>
-            <a:r>
-              <a:rPr sz="1800" b="0">
-                <a:solidFill>
-                  <a:srgbClr val="1A1A1A"/>
-                </a:solidFill>
-                <a:latin typeface="Calibri"/>
-              </a:rPr>
-              <a:t>• External NIST validation (κ = 0.49 ensemble) confirms moderate-substantial agreement on a public IR benchmark</a:t>
-            </a:r>
-          </a:p>
-          <a:p>
-            <a:pPr>
-              <a:lnSpc>
-                <a:spcPct val="135000"/>
-              </a:lnSpc>
-            </a:pPr>
-            <a:r>
-              <a:rPr sz="1800" b="1">
-                <a:solidFill>
-                  <a:srgbClr val="1A1A1A"/>
-                </a:solidFill>
-                <a:latin typeface="Calibri"/>
-              </a:rPr>
-              <a:t>• Mechanism: 93% of pairwise κ variance is joint-distribution structure of paired scores — a NEW insight for ensemble design</a:t>
-            </a:r>
-          </a:p>
-        </p:txBody>
-      </p:sp>
-      <p:sp>
-        <p:nvSpPr>
-          <p:cNvPr id="4" name="TextBox 3"/>
+              <a:t>ALWAYS-WORKS 6-judge subset (≥95% on TREC RAG + BEIR scifact): Anthropic + OpenAI + Qwen + Gemma. The 2 cheapest open-weight judges make this subset. Gemini fails on web/biomedical content more than on scientific abstracts — reliability is content-domain dependent.</a:t>
+            </a:r>
+          </a:p>
+        </p:txBody>
+      </p:sp>
+      <p:sp>
+        <p:nvSpPr>
+          <p:cNvPr id="5" name="TextBox 4"/>
           <p:cNvSpPr txBox="1"/>
           <p:nvPr/>
         </p:nvSpPr>
@@ -6165,7 +7214,7 @@
       </p:sp>
       <p:sp>
         <p:nvSpPr>
-          <p:cNvPr id="5" name="TextBox 4"/>
+          <p:cNvPr id="6" name="TextBox 5"/>
           <p:cNvSpPr txBox="1"/>
           <p:nvPr/>
         </p:nvSpPr>
@@ -6193,7 +7242,7 @@
                 </a:solidFill>
                 <a:latin typeface="Calibri"/>
               </a:rPr>
-              <a:t>14/15</a:t>
+              <a:t>14/16</a:t>
             </a:r>
           </a:p>
         </p:txBody>
@@ -6224,6 +7273,232 @@
         </p:nvSpPr>
         <p:spPr>
           <a:xfrm>
+            <a:off x="457200" y="320040"/>
+            <a:ext cx="11247120" cy="640080"/>
+          </a:xfrm>
+          <a:prstGeom prst="rect">
+            <a:avLst/>
+          </a:prstGeom>
+          <a:noFill/>
+        </p:spPr>
+        <p:txBody>
+          <a:bodyPr wrap="square" anchor="t">
+            <a:spAutoFit/>
+          </a:bodyPr>
+          <a:lstStyle/>
+          <a:p>
+            <a:pPr algn="l"/>
+            <a:r>
+              <a:rPr sz="3200" b="1">
+                <a:solidFill>
+                  <a:srgbClr val="0E4A86"/>
+                </a:solidFill>
+                <a:latin typeface="Calibri"/>
+              </a:rPr>
+              <a:t>Takeaway</a:t>
+            </a:r>
+          </a:p>
+        </p:txBody>
+      </p:sp>
+      <p:sp>
+        <p:nvSpPr>
+          <p:cNvPr id="3" name="TextBox 2"/>
+          <p:cNvSpPr txBox="1"/>
+          <p:nvPr/>
+        </p:nvSpPr>
+        <p:spPr>
+          <a:xfrm>
+            <a:off x="640080" y="1280160"/>
+            <a:ext cx="11430000" cy="4572000"/>
+          </a:xfrm>
+          <a:prstGeom prst="rect">
+            <a:avLst/>
+          </a:prstGeom>
+          <a:noFill/>
+        </p:spPr>
+        <p:txBody>
+          <a:bodyPr wrap="square">
+            <a:spAutoFit/>
+          </a:bodyPr>
+          <a:lstStyle/>
+          <a:p>
+            <a:pPr>
+              <a:lnSpc>
+                <a:spcPct val="135000"/>
+              </a:lnSpc>
+            </a:pPr>
+            <a:r>
+              <a:rPr sz="1800" b="1">
+                <a:solidFill>
+                  <a:srgbClr val="1A1A1A"/>
+                </a:solidFill>
+                <a:latin typeface="Calibri"/>
+              </a:rPr>
+              <a:t>• CALIBRATION PHILOSOPHY (lenient vs strict score-allocation pattern), NOT provider lineage, is the axis on which retrieval verdicts shift</a:t>
+            </a:r>
+          </a:p>
+          <a:p>
+            <a:pPr>
+              <a:lnSpc>
+                <a:spcPct val="135000"/>
+              </a:lnSpc>
+            </a:pPr>
+            <a:r>
+              <a:rPr sz="1800" b="0">
+                <a:solidFill>
+                  <a:srgbClr val="1A1A1A"/>
+                </a:solidFill>
+                <a:latin typeface="Calibri"/>
+              </a:rPr>
+              <a:t>• Cross-family agreement (κ ≥ 0.75) is high enough that judge interchangeability is a defensible default for reasoning-capable commercial judges</a:t>
+            </a:r>
+          </a:p>
+          <a:p>
+            <a:pPr>
+              <a:lnSpc>
+                <a:spcPct val="135000"/>
+              </a:lnSpc>
+            </a:pPr>
+            <a:r>
+              <a:rPr sz="1800" b="1">
+                <a:solidFill>
+                  <a:srgbClr val="1A1A1A"/>
+                </a:solidFill>
+                <a:latin typeface="Calibri"/>
+              </a:rPr>
+              <a:t>• Cross-organization open-weight ensemble (Qwen + Gemma 4) achieves matrix-highest κ at ~1% commercial cost — sovereign-cloud / on-prem deployments are NOT condemned to lower-quality judging</a:t>
+            </a:r>
+          </a:p>
+          <a:p>
+            <a:pPr>
+              <a:lnSpc>
+                <a:spcPct val="135000"/>
+              </a:lnSpc>
+            </a:pPr>
+            <a:r>
+              <a:rPr sz="1800" b="0">
+                <a:solidFill>
+                  <a:srgbClr val="1A1A1A"/>
+                </a:solidFill>
+                <a:latin typeface="Calibri"/>
+              </a:rPr>
+              <a:t>• External NIST validation (κ = 0.49 ensemble) confirms moderate-substantial agreement on a public IR benchmark</a:t>
+            </a:r>
+          </a:p>
+          <a:p>
+            <a:pPr>
+              <a:lnSpc>
+                <a:spcPct val="135000"/>
+              </a:lnSpc>
+            </a:pPr>
+            <a:r>
+              <a:rPr sz="1800" b="1">
+                <a:solidFill>
+                  <a:srgbClr val="1A1A1A"/>
+                </a:solidFill>
+                <a:latin typeface="Calibri"/>
+              </a:rPr>
+              <a:t>• Mechanism: 93% of pairwise κ variance is joint-distribution structure of paired scores — a NEW insight for ensemble design</a:t>
+            </a:r>
+          </a:p>
+        </p:txBody>
+      </p:sp>
+      <p:sp>
+        <p:nvSpPr>
+          <p:cNvPr id="4" name="TextBox 3"/>
+          <p:cNvSpPr txBox="1"/>
+          <p:nvPr/>
+        </p:nvSpPr>
+        <p:spPr>
+          <a:xfrm>
+            <a:off x="457200" y="6446520"/>
+            <a:ext cx="11247120" cy="274320"/>
+          </a:xfrm>
+          <a:prstGeom prst="rect">
+            <a:avLst/>
+          </a:prstGeom>
+          <a:noFill/>
+        </p:spPr>
+        <p:txBody>
+          <a:bodyPr wrap="square" anchor="t">
+            <a:spAutoFit/>
+          </a:bodyPr>
+          <a:lstStyle/>
+          <a:p>
+            <a:pPr algn="l"/>
+            <a:r>
+              <a:rPr sz="1000" b="0">
+                <a:solidFill>
+                  <a:srgbClr val="707070"/>
+                </a:solidFill>
+                <a:latin typeface="Calibri"/>
+              </a:rPr>
+              <a:t>P4 — SHORT</a:t>
+            </a:r>
+          </a:p>
+        </p:txBody>
+      </p:sp>
+      <p:sp>
+        <p:nvSpPr>
+          <p:cNvPr id="5" name="TextBox 4"/>
+          <p:cNvSpPr txBox="1"/>
+          <p:nvPr/>
+        </p:nvSpPr>
+        <p:spPr>
+          <a:xfrm>
+            <a:off x="11430000" y="6446520"/>
+            <a:ext cx="640080" cy="274320"/>
+          </a:xfrm>
+          <a:prstGeom prst="rect">
+            <a:avLst/>
+          </a:prstGeom>
+          <a:noFill/>
+        </p:spPr>
+        <p:txBody>
+          <a:bodyPr wrap="square" anchor="t">
+            <a:spAutoFit/>
+          </a:bodyPr>
+          <a:lstStyle/>
+          <a:p>
+            <a:pPr algn="r"/>
+            <a:r>
+              <a:rPr sz="1000" b="0">
+                <a:solidFill>
+                  <a:srgbClr val="707070"/>
+                </a:solidFill>
+                <a:latin typeface="Calibri"/>
+              </a:rPr>
+              <a:t>15/16</a:t>
+            </a:r>
+          </a:p>
+        </p:txBody>
+      </p:sp>
+    </p:spTree>
+  </p:cSld>
+  <p:clrMapOvr>
+    <a:masterClrMapping/>
+  </p:clrMapOvr>
+</p:sld>
+</file>
+
+<file path=ppt/slides/slide16.xml><?xml version="1.0" encoding="utf-8"?>
+<p:sld xmlns:a="http://schemas.openxmlformats.org/drawingml/2006/main" xmlns:p="http://schemas.openxmlformats.org/presentationml/2006/main" xmlns:r="http://schemas.openxmlformats.org/officeDocument/2006/relationships">
+  <p:cSld>
+    <p:spTree>
+      <p:nvGrpSpPr>
+        <p:cNvPr id="1" name=""/>
+        <p:cNvGrpSpPr/>
+        <p:nvPr/>
+      </p:nvGrpSpPr>
+      <p:grpSpPr/>
+      <p:sp>
+        <p:nvSpPr>
+          <p:cNvPr id="2" name="TextBox 1"/>
+          <p:cNvSpPr txBox="1"/>
+          <p:nvPr/>
+        </p:nvSpPr>
+        <p:spPr>
+          <a:xfrm>
             <a:off x="914400" y="2286000"/>
             <a:ext cx="10332720" cy="1371600"/>
           </a:xfrm>
@@ -6316,7 +7591,7 @@
                 </a:solidFill>
                 <a:latin typeface="Calibri"/>
               </a:rPr>
-              <a:t>Code + data + paper draft: github.com/asukul/p4-llm-judge (forthcoming)</a:t>
+              <a:t>Code + data + paper draft: github.com/asukul/RAG-Eval-LLM-Judge</a:t>
             </a:r>
           </a:p>
         </p:txBody>
@@ -6386,7 +7661,7 @@
                 </a:solidFill>
                 <a:latin typeface="Calibri"/>
               </a:rPr>
-              <a:t>15/15</a:t>
+              <a:t>16/16</a:t>
             </a:r>
           </a:p>
         </p:txBody>
@@ -6647,7 +7922,7 @@
                 </a:solidFill>
                 <a:latin typeface="Calibri"/>
               </a:rPr>
-              <a:t>2/15</a:t>
+              <a:t>2/16</a:t>
             </a:r>
           </a:p>
         </p:txBody>
@@ -6924,7 +8199,7 @@
                 </a:solidFill>
                 <a:latin typeface="Calibri"/>
               </a:rPr>
-              <a:t>3/15</a:t>
+              <a:t>3/16</a:t>
             </a:r>
           </a:p>
         </p:txBody>
@@ -8281,7 +9556,7 @@
                 </a:solidFill>
                 <a:latin typeface="Calibri"/>
               </a:rPr>
-              <a:t>4/15</a:t>
+              <a:t>4/16</a:t>
             </a:r>
           </a:p>
         </p:txBody>
@@ -8463,7 +9738,7 @@
                 </a:solidFill>
                 <a:latin typeface="Calibri"/>
               </a:rPr>
-              <a:t>5/15</a:t>
+              <a:t>5/16</a:t>
             </a:r>
           </a:p>
         </p:txBody>
@@ -10051,7 +11326,7 @@
                 </a:solidFill>
                 <a:latin typeface="Calibri"/>
               </a:rPr>
-              <a:t>6/15</a:t>
+              <a:t>6/16</a:t>
             </a:r>
           </a:p>
         </p:txBody>
@@ -10161,7 +11436,7 @@
         <p:spPr>
           <a:xfrm>
             <a:off x="2286000" y="1463040"/>
-            <a:ext cx="6468848" cy="4937760"/>
+            <a:ext cx="5580675" cy="4937760"/>
           </a:xfrm>
           <a:prstGeom prst="rect">
             <a:avLst/>
@@ -10233,7 +11508,7 @@
                 </a:solidFill>
                 <a:latin typeface="Calibri"/>
               </a:rPr>
-              <a:t>7/15</a:t>
+              <a:t>7/16</a:t>
             </a:r>
           </a:p>
         </p:txBody>
@@ -10380,7 +11655,7 @@
                 </a:solidFill>
                 <a:latin typeface="Calibri"/>
               </a:rPr>
-              <a:t>8/15</a:t>
+              <a:t>8/16</a:t>
             </a:r>
           </a:p>
         </p:txBody>
@@ -10606,7 +11881,7 @@
                 </a:solidFill>
                 <a:latin typeface="Calibri"/>
               </a:rPr>
-              <a:t>9/15</a:t>
+              <a:t>9/16</a:t>
             </a:r>
           </a:p>
         </p:txBody>

--- a/slides/P4-SHORT.pptx
+++ b/slides/P4-SHORT.pptx
@@ -5126,7 +5126,7 @@
                 </a:solidFill>
                 <a:latin typeface="Calibri"/>
               </a:rPr>
-              <a:t>Third-corpus replication — TREC-COVID biomedical (300 pairs)</a:t>
+              <a:t>Third-corpus replication — TREC-COVID biomedical (300 pairs, 9 judges)</a:t>
             </a:r>
           </a:p>
         </p:txBody>
@@ -5141,7 +5141,7 @@
         </p:nvGraphicFramePr>
         <p:xfrm>
           <a:off x="640080" y="1280160"/>
-          <a:ext cx="7132320" cy="2798064"/>
+          <a:ext cx="7132320" cy="3730752"/>
         </p:xfrm>
         <a:graphic>
           <a:graphicData uri="http://schemas.openxmlformats.org/drawingml/2006/table">
@@ -5163,7 +5163,7 @@
                     <a:p>
                       <a:pPr algn="l"/>
                       <a:r>
-                        <a:rPr sz="1400" b="1">
+                        <a:rPr sz="1300" b="1">
                           <a:solidFill>
                             <a:srgbClr val="FFFFFF"/>
                           </a:solidFill>
@@ -5186,7 +5186,7 @@
                     <a:p>
                       <a:pPr algn="r"/>
                       <a:r>
-                        <a:rPr sz="1400" b="1">
+                        <a:rPr sz="1300" b="1">
                           <a:solidFill>
                             <a:srgbClr val="FFFFFF"/>
                           </a:solidFill>
@@ -5209,7 +5209,7 @@
                     <a:p>
                       <a:pPr algn="r"/>
                       <a:r>
-                        <a:rPr sz="1400" b="1">
+                        <a:rPr sz="1300" b="1">
                           <a:solidFill>
                             <a:srgbClr val="FFFFFF"/>
                           </a:solidFill>
@@ -5232,7 +5232,7 @@
                     <a:p>
                       <a:pPr algn="r"/>
                       <a:r>
-                        <a:rPr sz="1400" b="1">
+                        <a:rPr sz="1300" b="1">
                           <a:solidFill>
                             <a:srgbClr val="FFFFFF"/>
                           </a:solidFill>
@@ -5257,7 +5257,7 @@
                     <a:p>
                       <a:pPr algn="l"/>
                       <a:r>
-                        <a:rPr sz="1400">
+                        <a:rPr sz="1300">
                           <a:solidFill>
                             <a:srgbClr val="1A1A1A"/>
                           </a:solidFill>
@@ -5280,7 +5280,7 @@
                     <a:p>
                       <a:pPr algn="r"/>
                       <a:r>
-                        <a:rPr sz="1400">
+                        <a:rPr sz="1300">
                           <a:solidFill>
                             <a:srgbClr val="1A1A1A"/>
                           </a:solidFill>
@@ -5303,7 +5303,7 @@
                     <a:p>
                       <a:pPr algn="r"/>
                       <a:r>
-                        <a:rPr sz="1400">
+                        <a:rPr sz="1300">
                           <a:solidFill>
                             <a:srgbClr val="1A1A1A"/>
                           </a:solidFill>
@@ -5326,7 +5326,7 @@
                     <a:p>
                       <a:pPr algn="r"/>
                       <a:r>
-                        <a:rPr sz="1400">
+                        <a:rPr sz="1300">
                           <a:solidFill>
                             <a:srgbClr val="1A1A1A"/>
                           </a:solidFill>
@@ -5351,7 +5351,7 @@
                     <a:p>
                       <a:pPr algn="l"/>
                       <a:r>
-                        <a:rPr sz="1400">
+                        <a:rPr sz="1300">
                           <a:solidFill>
                             <a:srgbClr val="1A1A1A"/>
                           </a:solidFill>
@@ -5374,7 +5374,7 @@
                     <a:p>
                       <a:pPr algn="r"/>
                       <a:r>
-                        <a:rPr sz="1400">
+                        <a:rPr sz="1300">
                           <a:solidFill>
                             <a:srgbClr val="1A1A1A"/>
                           </a:solidFill>
@@ -5397,7 +5397,7 @@
                     <a:p>
                       <a:pPr algn="r"/>
                       <a:r>
-                        <a:rPr sz="1400">
+                        <a:rPr sz="1300">
                           <a:solidFill>
                             <a:srgbClr val="1A1A1A"/>
                           </a:solidFill>
@@ -5420,7 +5420,7 @@
                     <a:p>
                       <a:pPr algn="r"/>
                       <a:r>
-                        <a:rPr sz="1400">
+                        <a:rPr sz="1300">
                           <a:solidFill>
                             <a:srgbClr val="1A1A1A"/>
                           </a:solidFill>
@@ -5445,7 +5445,7 @@
                     <a:p>
                       <a:pPr algn="l"/>
                       <a:r>
-                        <a:rPr sz="1400">
+                        <a:rPr sz="1300">
                           <a:solidFill>
                             <a:srgbClr val="1A1A1A"/>
                           </a:solidFill>
@@ -5468,7 +5468,7 @@
                     <a:p>
                       <a:pPr algn="r"/>
                       <a:r>
-                        <a:rPr sz="1400">
+                        <a:rPr sz="1300">
                           <a:solidFill>
                             <a:srgbClr val="1A1A1A"/>
                           </a:solidFill>
@@ -5491,7 +5491,7 @@
                     <a:p>
                       <a:pPr algn="r"/>
                       <a:r>
-                        <a:rPr sz="1400">
+                        <a:rPr sz="1300">
                           <a:solidFill>
                             <a:srgbClr val="1A1A1A"/>
                           </a:solidFill>
@@ -5514,7 +5514,7 @@
                     <a:p>
                       <a:pPr algn="r"/>
                       <a:r>
-                        <a:rPr sz="1400">
+                        <a:rPr sz="1300">
                           <a:solidFill>
                             <a:srgbClr val="1A1A1A"/>
                           </a:solidFill>
@@ -5539,7 +5539,7 @@
                     <a:p>
                       <a:pPr algn="l"/>
                       <a:r>
-                        <a:rPr sz="1400">
+                        <a:rPr sz="1300">
                           <a:solidFill>
                             <a:srgbClr val="1A1A1A"/>
                           </a:solidFill>
@@ -5562,7 +5562,7 @@
                     <a:p>
                       <a:pPr algn="r"/>
                       <a:r>
-                        <a:rPr sz="1400">
+                        <a:rPr sz="1300">
                           <a:solidFill>
                             <a:srgbClr val="1A1A1A"/>
                           </a:solidFill>
@@ -5585,7 +5585,7 @@
                     <a:p>
                       <a:pPr algn="r"/>
                       <a:r>
-                        <a:rPr sz="1400">
+                        <a:rPr sz="1300">
                           <a:solidFill>
                             <a:srgbClr val="1A1A1A"/>
                           </a:solidFill>
@@ -5608,7 +5608,7 @@
                     <a:p>
                       <a:pPr algn="r"/>
                       <a:r>
-                        <a:rPr sz="1400">
+                        <a:rPr sz="1300">
                           <a:solidFill>
                             <a:srgbClr val="1A1A1A"/>
                           </a:solidFill>
@@ -5633,7 +5633,7 @@
                     <a:p>
                       <a:pPr algn="l"/>
                       <a:r>
-                        <a:rPr sz="1400">
+                        <a:rPr sz="1300">
                           <a:solidFill>
                             <a:srgbClr val="1A1A1A"/>
                           </a:solidFill>
@@ -5656,13 +5656,13 @@
                     <a:p>
                       <a:pPr algn="r"/>
                       <a:r>
-                        <a:rPr sz="1400">
-                          <a:solidFill>
-                            <a:srgbClr val="1A1A1A"/>
-                          </a:solidFill>
-                          <a:latin typeface="Calibri"/>
-                        </a:rPr>
-                        <a:t>DeepSeek V4 Pro</a:t>
+                        <a:rPr sz="1300">
+                          <a:solidFill>
+                            <a:srgbClr val="1A1A1A"/>
+                          </a:solidFill>
+                          <a:latin typeface="Calibri"/>
+                        </a:rPr>
+                        <a:t>Qwen 3.6 Plus</a:t>
                       </a:r>
                     </a:p>
                   </a:txBody>
@@ -5679,13 +5679,13 @@
                     <a:p>
                       <a:pPr algn="r"/>
                       <a:r>
-                        <a:rPr sz="1400">
-                          <a:solidFill>
-                            <a:srgbClr val="1A1A1A"/>
-                          </a:solidFill>
-                          <a:latin typeface="Calibri"/>
-                        </a:rPr>
-                        <a:t>0.3144</a:t>
+                        <a:rPr sz="1300">
+                          <a:solidFill>
+                            <a:srgbClr val="1A1A1A"/>
+                          </a:solidFill>
+                          <a:latin typeface="Calibri"/>
+                        </a:rPr>
+                        <a:t>0.3181</a:t>
                       </a:r>
                     </a:p>
                   </a:txBody>
@@ -5702,13 +5702,13 @@
                     <a:p>
                       <a:pPr algn="r"/>
                       <a:r>
-                        <a:rPr sz="1400">
-                          <a:solidFill>
-                            <a:srgbClr val="1A1A1A"/>
-                          </a:solidFill>
-                          <a:latin typeface="Calibri"/>
-                        </a:rPr>
-                        <a:t>250</a:t>
+                        <a:rPr sz="1300">
+                          <a:solidFill>
+                            <a:srgbClr val="1A1A1A"/>
+                          </a:solidFill>
+                          <a:latin typeface="Calibri"/>
+                        </a:rPr>
+                        <a:t>300</a:t>
                       </a:r>
                     </a:p>
                   </a:txBody>
@@ -5727,7 +5727,7 @@
                     <a:p>
                       <a:pPr algn="l"/>
                       <a:r>
-                        <a:rPr sz="1400">
+                        <a:rPr sz="1300">
                           <a:solidFill>
                             <a:srgbClr val="1A1A1A"/>
                           </a:solidFill>
@@ -5750,13 +5750,13 @@
                     <a:p>
                       <a:pPr algn="r"/>
                       <a:r>
-                        <a:rPr sz="1400">
-                          <a:solidFill>
-                            <a:srgbClr val="1A1A1A"/>
-                          </a:solidFill>
-                          <a:latin typeface="Calibri"/>
-                        </a:rPr>
-                        <a:t>Gemini 3.1 Pro Preview</a:t>
+                        <a:rPr sz="1300">
+                          <a:solidFill>
+                            <a:srgbClr val="1A1A1A"/>
+                          </a:solidFill>
+                          <a:latin typeface="Calibri"/>
+                        </a:rPr>
+                        <a:t>DeepSeek V4 Pro</a:t>
                       </a:r>
                     </a:p>
                   </a:txBody>
@@ -5773,13 +5773,13 @@
                     <a:p>
                       <a:pPr algn="r"/>
                       <a:r>
-                        <a:rPr sz="1400">
-                          <a:solidFill>
-                            <a:srgbClr val="1A1A1A"/>
-                          </a:solidFill>
-                          <a:latin typeface="Calibri"/>
-                        </a:rPr>
-                        <a:t>0.2202</a:t>
+                        <a:rPr sz="1300">
+                          <a:solidFill>
+                            <a:srgbClr val="1A1A1A"/>
+                          </a:solidFill>
+                          <a:latin typeface="Calibri"/>
+                        </a:rPr>
+                        <a:t>0.3144</a:t>
                       </a:r>
                     </a:p>
                   </a:txBody>
@@ -5796,13 +5796,13 @@
                     <a:p>
                       <a:pPr algn="r"/>
                       <a:r>
-                        <a:rPr sz="1400">
-                          <a:solidFill>
-                            <a:srgbClr val="1A1A1A"/>
-                          </a:solidFill>
-                          <a:latin typeface="Calibri"/>
-                        </a:rPr>
-                        <a:t>133</a:t>
+                        <a:rPr sz="1300">
+                          <a:solidFill>
+                            <a:srgbClr val="1A1A1A"/>
+                          </a:solidFill>
+                          <a:latin typeface="Calibri"/>
+                        </a:rPr>
+                        <a:t>250</a:t>
                       </a:r>
                     </a:p>
                   </a:txBody>
@@ -5821,13 +5821,13 @@
                     <a:p>
                       <a:pPr algn="l"/>
                       <a:r>
-                        <a:rPr sz="1400">
-                          <a:solidFill>
-                            <a:srgbClr val="1A1A1A"/>
-                          </a:solidFill>
-                          <a:latin typeface="Calibri"/>
-                        </a:rPr>
-                        <a:t>—</a:t>
+                        <a:rPr sz="1300">
+                          <a:solidFill>
+                            <a:srgbClr val="1A1A1A"/>
+                          </a:solidFill>
+                          <a:latin typeface="Calibri"/>
+                        </a:rPr>
+                        <a:t>7</a:t>
                       </a:r>
                     </a:p>
                   </a:txBody>
@@ -5844,13 +5844,13 @@
                     <a:p>
                       <a:pPr algn="r"/>
                       <a:r>
-                        <a:rPr sz="1400">
-                          <a:solidFill>
-                            <a:srgbClr val="1A1A1A"/>
-                          </a:solidFill>
-                          <a:latin typeface="Calibri"/>
-                        </a:rPr>
-                        <a:t>Gemini 2.5 Pro</a:t>
+                        <a:rPr sz="1300">
+                          <a:solidFill>
+                            <a:srgbClr val="1A1A1A"/>
+                          </a:solidFill>
+                          <a:latin typeface="Calibri"/>
+                        </a:rPr>
+                        <a:t>Gemma 4 26B</a:t>
                       </a:r>
                     </a:p>
                   </a:txBody>
@@ -5867,13 +5867,13 @@
                     <a:p>
                       <a:pPr algn="r"/>
                       <a:r>
-                        <a:rPr sz="1400">
-                          <a:solidFill>
-                            <a:srgbClr val="1A1A1A"/>
-                          </a:solidFill>
-                          <a:latin typeface="Calibri"/>
-                        </a:rPr>
-                        <a:t>n/a (small-n)</a:t>
+                        <a:rPr sz="1300">
+                          <a:solidFill>
+                            <a:srgbClr val="1A1A1A"/>
+                          </a:solidFill>
+                          <a:latin typeface="Calibri"/>
+                        </a:rPr>
+                        <a:t>0.2743</a:t>
                       </a:r>
                     </a:p>
                   </a:txBody>
@@ -5890,13 +5890,13 @@
                     <a:p>
                       <a:pPr algn="r"/>
                       <a:r>
-                        <a:rPr sz="1400">
-                          <a:solidFill>
-                            <a:srgbClr val="1A1A1A"/>
-                          </a:solidFill>
-                          <a:latin typeface="Calibri"/>
-                        </a:rPr>
-                        <a:t>19</a:t>
+                        <a:rPr sz="1300">
+                          <a:solidFill>
+                            <a:srgbClr val="1A1A1A"/>
+                          </a:solidFill>
+                          <a:latin typeface="Calibri"/>
+                        </a:rPr>
+                        <a:t>300</a:t>
                       </a:r>
                     </a:p>
                   </a:txBody>
@@ -5915,7 +5915,195 @@
                     <a:p>
                       <a:pPr algn="l"/>
                       <a:r>
-                        <a:rPr sz="1400">
+                        <a:rPr sz="1300">
+                          <a:solidFill>
+                            <a:srgbClr val="1A1A1A"/>
+                          </a:solidFill>
+                          <a:latin typeface="Calibri"/>
+                        </a:rPr>
+                        <a:t>8</a:t>
+                      </a:r>
+                    </a:p>
+                  </a:txBody>
+                  <a:tcPr marL="73152" marR="73152" marT="36576" marB="36576">
+                    <a:solidFill>
+                      <a:srgbClr val="F5F5F5"/>
+                    </a:solidFill>
+                  </a:tcPr>
+                </a:tc>
+                <a:tc>
+                  <a:txBody>
+                    <a:bodyPr wrap="square"/>
+                    <a:lstStyle/>
+                    <a:p>
+                      <a:pPr algn="r"/>
+                      <a:r>
+                        <a:rPr sz="1300">
+                          <a:solidFill>
+                            <a:srgbClr val="1A1A1A"/>
+                          </a:solidFill>
+                          <a:latin typeface="Calibri"/>
+                        </a:rPr>
+                        <a:t>Gemini 3.1 Pro Preview</a:t>
+                      </a:r>
+                    </a:p>
+                  </a:txBody>
+                  <a:tcPr marL="73152" marR="73152" marT="36576" marB="36576">
+                    <a:solidFill>
+                      <a:srgbClr val="F5F5F5"/>
+                    </a:solidFill>
+                  </a:tcPr>
+                </a:tc>
+                <a:tc>
+                  <a:txBody>
+                    <a:bodyPr wrap="square"/>
+                    <a:lstStyle/>
+                    <a:p>
+                      <a:pPr algn="r"/>
+                      <a:r>
+                        <a:rPr sz="1300">
+                          <a:solidFill>
+                            <a:srgbClr val="1A1A1A"/>
+                          </a:solidFill>
+                          <a:latin typeface="Calibri"/>
+                        </a:rPr>
+                        <a:t>0.2202</a:t>
+                      </a:r>
+                    </a:p>
+                  </a:txBody>
+                  <a:tcPr marL="73152" marR="73152" marT="36576" marB="36576">
+                    <a:solidFill>
+                      <a:srgbClr val="F5F5F5"/>
+                    </a:solidFill>
+                  </a:tcPr>
+                </a:tc>
+                <a:tc>
+                  <a:txBody>
+                    <a:bodyPr wrap="square"/>
+                    <a:lstStyle/>
+                    <a:p>
+                      <a:pPr algn="r"/>
+                      <a:r>
+                        <a:rPr sz="1300">
+                          <a:solidFill>
+                            <a:srgbClr val="1A1A1A"/>
+                          </a:solidFill>
+                          <a:latin typeface="Calibri"/>
+                        </a:rPr>
+                        <a:t>133</a:t>
+                      </a:r>
+                    </a:p>
+                  </a:txBody>
+                  <a:tcPr marL="73152" marR="73152" marT="36576" marB="36576">
+                    <a:solidFill>
+                      <a:srgbClr val="F5F5F5"/>
+                    </a:solidFill>
+                  </a:tcPr>
+                </a:tc>
+              </a:tr>
+              <a:tr h="310896">
+                <a:tc>
+                  <a:txBody>
+                    <a:bodyPr wrap="square"/>
+                    <a:lstStyle/>
+                    <a:p>
+                      <a:pPr algn="l"/>
+                      <a:r>
+                        <a:rPr sz="1300">
+                          <a:solidFill>
+                            <a:srgbClr val="1A1A1A"/>
+                          </a:solidFill>
+                          <a:latin typeface="Calibri"/>
+                        </a:rPr>
+                        <a:t>—</a:t>
+                      </a:r>
+                    </a:p>
+                  </a:txBody>
+                  <a:tcPr marL="73152" marR="73152" marT="36576" marB="36576">
+                    <a:solidFill>
+                      <a:srgbClr val="FFFFFF"/>
+                    </a:solidFill>
+                  </a:tcPr>
+                </a:tc>
+                <a:tc>
+                  <a:txBody>
+                    <a:bodyPr wrap="square"/>
+                    <a:lstStyle/>
+                    <a:p>
+                      <a:pPr algn="r"/>
+                      <a:r>
+                        <a:rPr sz="1300">
+                          <a:solidFill>
+                            <a:srgbClr val="1A1A1A"/>
+                          </a:solidFill>
+                          <a:latin typeface="Calibri"/>
+                        </a:rPr>
+                        <a:t>Gemini 2.5 Pro</a:t>
+                      </a:r>
+                    </a:p>
+                  </a:txBody>
+                  <a:tcPr marL="73152" marR="73152" marT="36576" marB="36576">
+                    <a:solidFill>
+                      <a:srgbClr val="FFFFFF"/>
+                    </a:solidFill>
+                  </a:tcPr>
+                </a:tc>
+                <a:tc>
+                  <a:txBody>
+                    <a:bodyPr wrap="square"/>
+                    <a:lstStyle/>
+                    <a:p>
+                      <a:pPr algn="r"/>
+                      <a:r>
+                        <a:rPr sz="1300">
+                          <a:solidFill>
+                            <a:srgbClr val="1A1A1A"/>
+                          </a:solidFill>
+                          <a:latin typeface="Calibri"/>
+                        </a:rPr>
+                        <a:t>n/a (small-n)</a:t>
+                      </a:r>
+                    </a:p>
+                  </a:txBody>
+                  <a:tcPr marL="73152" marR="73152" marT="36576" marB="36576">
+                    <a:solidFill>
+                      <a:srgbClr val="FFFFFF"/>
+                    </a:solidFill>
+                  </a:tcPr>
+                </a:tc>
+                <a:tc>
+                  <a:txBody>
+                    <a:bodyPr wrap="square"/>
+                    <a:lstStyle/>
+                    <a:p>
+                      <a:pPr algn="r"/>
+                      <a:r>
+                        <a:rPr sz="1300">
+                          <a:solidFill>
+                            <a:srgbClr val="1A1A1A"/>
+                          </a:solidFill>
+                          <a:latin typeface="Calibri"/>
+                        </a:rPr>
+                        <a:t>19</a:t>
+                      </a:r>
+                    </a:p>
+                  </a:txBody>
+                  <a:tcPr marL="73152" marR="73152" marT="36576" marB="36576">
+                    <a:solidFill>
+                      <a:srgbClr val="FFFFFF"/>
+                    </a:solidFill>
+                  </a:tcPr>
+                </a:tc>
+              </a:tr>
+              <a:tr h="310896">
+                <a:tc>
+                  <a:txBody>
+                    <a:bodyPr wrap="square"/>
+                    <a:lstStyle/>
+                    <a:p>
+                      <a:pPr algn="l"/>
+                      <a:r>
+                        <a:rPr sz="1300">
                           <a:solidFill>
                             <a:srgbClr val="1A1A1A"/>
                           </a:solidFill>
@@ -5938,13 +6126,13 @@
                     <a:p>
                       <a:pPr algn="r"/>
                       <a:r>
-                        <a:rPr sz="1400">
-                          <a:solidFill>
-                            <a:srgbClr val="1A1A1A"/>
-                          </a:solidFill>
-                          <a:latin typeface="Calibri"/>
-                        </a:rPr>
-                        <a:t>Frontier-7 ensemble median</a:t>
+                        <a:rPr sz="1300">
+                          <a:solidFill>
+                            <a:srgbClr val="1A1A1A"/>
+                          </a:solidFill>
+                          <a:latin typeface="Calibri"/>
+                        </a:rPr>
+                        <a:t>9-judge ensemble median</a:t>
                       </a:r>
                     </a:p>
                   </a:txBody>
@@ -5961,7 +6149,101 @@
                     <a:p>
                       <a:pPr algn="r"/>
                       <a:r>
-                        <a:rPr sz="1400">
+                        <a:rPr sz="1300">
+                          <a:solidFill>
+                            <a:srgbClr val="1A1A1A"/>
+                          </a:solidFill>
+                          <a:latin typeface="Calibri"/>
+                        </a:rPr>
+                        <a:t>0.3447</a:t>
+                      </a:r>
+                    </a:p>
+                  </a:txBody>
+                  <a:tcPr marL="73152" marR="73152" marT="36576" marB="36576">
+                    <a:solidFill>
+                      <a:srgbClr val="F5F5F5"/>
+                    </a:solidFill>
+                  </a:tcPr>
+                </a:tc>
+                <a:tc>
+                  <a:txBody>
+                    <a:bodyPr wrap="square"/>
+                    <a:lstStyle/>
+                    <a:p>
+                      <a:pPr algn="r"/>
+                      <a:r>
+                        <a:rPr sz="1300">
+                          <a:solidFill>
+                            <a:srgbClr val="1A1A1A"/>
+                          </a:solidFill>
+                          <a:latin typeface="Calibri"/>
+                        </a:rPr>
+                        <a:t>300</a:t>
+                      </a:r>
+                    </a:p>
+                  </a:txBody>
+                  <a:tcPr marL="73152" marR="73152" marT="36576" marB="36576">
+                    <a:solidFill>
+                      <a:srgbClr val="F5F5F5"/>
+                    </a:solidFill>
+                  </a:tcPr>
+                </a:tc>
+              </a:tr>
+              <a:tr h="310896">
+                <a:tc>
+                  <a:txBody>
+                    <a:bodyPr wrap="square"/>
+                    <a:lstStyle/>
+                    <a:p>
+                      <a:pPr algn="l"/>
+                      <a:r>
+                        <a:rPr sz="1300">
+                          <a:solidFill>
+                            <a:srgbClr val="1A1A1A"/>
+                          </a:solidFill>
+                          <a:latin typeface="Calibri"/>
+                        </a:rPr>
+                        <a:t/>
+                      </a:r>
+                    </a:p>
+                  </a:txBody>
+                  <a:tcPr marL="73152" marR="73152" marT="36576" marB="36576">
+                    <a:solidFill>
+                      <a:srgbClr val="FFFFFF"/>
+                    </a:solidFill>
+                  </a:tcPr>
+                </a:tc>
+                <a:tc>
+                  <a:txBody>
+                    <a:bodyPr wrap="square"/>
+                    <a:lstStyle/>
+                    <a:p>
+                      <a:pPr algn="r"/>
+                      <a:r>
+                        <a:rPr sz="1300">
+                          <a:solidFill>
+                            <a:srgbClr val="1A1A1A"/>
+                          </a:solidFill>
+                          <a:latin typeface="Calibri"/>
+                        </a:rPr>
+                        <a:t>(frontier-7 ensemble for ref)</a:t>
+                      </a:r>
+                    </a:p>
+                  </a:txBody>
+                  <a:tcPr marL="73152" marR="73152" marT="36576" marB="36576">
+                    <a:solidFill>
+                      <a:srgbClr val="FFFFFF"/>
+                    </a:solidFill>
+                  </a:tcPr>
+                </a:tc>
+                <a:tc>
+                  <a:txBody>
+                    <a:bodyPr wrap="square"/>
+                    <a:lstStyle/>
+                    <a:p>
+                      <a:pPr algn="r"/>
+                      <a:r>
+                        <a:rPr sz="1300">
                           <a:solidFill>
                             <a:srgbClr val="1A1A1A"/>
                           </a:solidFill>
@@ -5973,18 +6255,18 @@
                   </a:txBody>
                   <a:tcPr marL="73152" marR="73152" marT="36576" marB="36576">
                     <a:solidFill>
-                      <a:srgbClr val="F5F5F5"/>
-                    </a:solidFill>
-                  </a:tcPr>
-                </a:tc>
-                <a:tc>
-                  <a:txBody>
-                    <a:bodyPr wrap="square"/>
-                    <a:lstStyle/>
-                    <a:p>
-                      <a:pPr algn="r"/>
-                      <a:r>
-                        <a:rPr sz="1400">
+                      <a:srgbClr val="FFFFFF"/>
+                    </a:solidFill>
+                  </a:tcPr>
+                </a:tc>
+                <a:tc>
+                  <a:txBody>
+                    <a:bodyPr wrap="square"/>
+                    <a:lstStyle/>
+                    <a:p>
+                      <a:pPr algn="r"/>
+                      <a:r>
+                        <a:rPr sz="1300">
                           <a:solidFill>
                             <a:srgbClr val="1A1A1A"/>
                           </a:solidFill>
@@ -5996,7 +6278,7 @@
                   </a:txBody>
                   <a:tcPr marL="73152" marR="73152" marT="36576" marB="36576">
                     <a:solidFill>
-                      <a:srgbClr val="F5F5F5"/>
+                      <a:srgbClr val="FFFFFF"/>
                     </a:solidFill>
                   </a:tcPr>
                 </a:tc>
@@ -6014,7 +6296,7 @@
         <p:spPr>
           <a:xfrm>
             <a:off x="8229600" y="1280160"/>
-            <a:ext cx="3657600" cy="4572000"/>
+            <a:ext cx="3657600" cy="5029200"/>
           </a:xfrm>
           <a:prstGeom prst="rect">
             <a:avLst/>
@@ -6029,7 +6311,7 @@
           <a:p>
             <a:pPr algn="l"/>
             <a:r>
-              <a:rPr sz="1200" b="0">
+              <a:rPr sz="1100" b="0">
                 <a:solidFill>
                   <a:srgbClr val="1A1A1A"/>
                 </a:solidFill>
@@ -6039,14 +6321,16 @@
 • ISU DSpace: within-pair max 0.80
   (no human gold available)
 • TREC RAG 2024: 9-judge κ = 0.4941
-  (web passages, MS MARCO v2.1)
+  (web passages)
 • BEIR scifact: precision 63.7%
   (κ undefined — all-positive qrels)
-• TREC-COVID: frontier-7 κ = 0.4462
+• TREC-COVID: 9-judge κ = 0.3447
   (biomedical scientific)
-All three public-corpus ensembles
-in the moderate Landis-Koch band.
-Robustness across content domains.</a:t>
+Open-weight broadens coverage
+(Qwen + Gemma both 100%)
+but lowers ensemble κ more on
+biomedical (-0.10) than on web
+(-0.025 on TREC RAG 2024).</a:t>
             </a:r>
           </a:p>
         </p:txBody>
@@ -6751,7 +7035,7 @@
                           </a:solidFill>
                           <a:latin typeface="Calibri"/>
                         </a:rPr>
-                        <a:t>—</a:t>
+                        <a:t>100%</a:t>
                       </a:r>
                     </a:p>
                   </a:txBody>
@@ -6845,7 +7129,7 @@
                           </a:solidFill>
                           <a:latin typeface="Calibri"/>
                         </a:rPr>
-                        <a:t>—</a:t>
+                        <a:t>100%</a:t>
                       </a:r>
                     </a:p>
                   </a:txBody>

--- a/slides/P4-SHORT.pptx
+++ b/slides/P4-SHORT.pptx
@@ -6322,7 +6322,7 @@
   (no human gold available)
 • TREC RAG 2024: 9-judge κ = 0.4941
   (web passages)
-• BEIR scifact: precision 63.7%
+• BEIR scifact: precision 65.7%
   (κ undefined — all-positive qrels)
 • TREC-COVID: 9-judge κ = 0.3447
   (biomedical scientific)

--- a/slides/P4-SHORT.pptx
+++ b/slides/P4-SHORT.pptx
@@ -21,6 +21,7 @@
     <p:sldId id="269" r:id="rId20"/>
     <p:sldId id="270" r:id="rId21"/>
     <p:sldId id="271" r:id="rId22"/>
+    <p:sldId id="272" r:id="rId23"/>
   </p:sldIdLst>
   <p:sldSz cx="12191695" cy="6858000" type="screen4x3"/>
   <p:notesSz cx="6858000" cy="9144000"/>
@@ -3309,7 +3310,7 @@
                 </a:solidFill>
                 <a:latin typeface="Calibri"/>
               </a:rPr>
-              <a:t>1/16</a:t>
+              <a:t>1/17</a:t>
             </a:r>
           </a:p>
         </p:txBody>
@@ -3570,7 +3571,7 @@
                 </a:solidFill>
                 <a:latin typeface="Calibri"/>
               </a:rPr>
-              <a:t>10/16</a:t>
+              <a:t>10/17</a:t>
             </a:r>
           </a:p>
         </p:txBody>
@@ -3752,7 +3753,7 @@
                 </a:solidFill>
                 <a:latin typeface="Calibri"/>
               </a:rPr>
-              <a:t>11/16</a:t>
+              <a:t>11/17</a:t>
             </a:r>
           </a:p>
         </p:txBody>
@@ -5073,7 +5074,7 @@
                 </a:solidFill>
                 <a:latin typeface="Calibri"/>
               </a:rPr>
-              <a:t>12/16</a:t>
+              <a:t>12/17</a:t>
             </a:r>
           </a:p>
         </p:txBody>
@@ -6400,7 +6401,7 @@
                 </a:solidFill>
                 <a:latin typeface="Calibri"/>
               </a:rPr>
-              <a:t>13/16</a:t>
+              <a:t>13/17</a:t>
             </a:r>
           </a:p>
         </p:txBody>
@@ -6414,6 +6415,313 @@
 </file>
 
 <file path=ppt/slides/slide14.xml><?xml version="1.0" encoding="utf-8"?>
+<p:sld xmlns:a="http://schemas.openxmlformats.org/drawingml/2006/main" xmlns:p="http://schemas.openxmlformats.org/presentationml/2006/main" xmlns:r="http://schemas.openxmlformats.org/officeDocument/2006/relationships">
+  <p:cSld>
+    <p:spTree>
+      <p:nvGrpSpPr>
+        <p:cNvPr id="1" name=""/>
+        <p:cNvGrpSpPr/>
+        <p:nvPr/>
+      </p:nvGrpSpPr>
+      <p:grpSpPr/>
+      <p:sp>
+        <p:nvSpPr>
+          <p:cNvPr id="2" name="TextBox 1"/>
+          <p:cNvSpPr txBox="1"/>
+          <p:nvPr/>
+        </p:nvSpPr>
+        <p:spPr>
+          <a:xfrm>
+            <a:off x="457200" y="320040"/>
+            <a:ext cx="11247120" cy="640080"/>
+          </a:xfrm>
+          <a:prstGeom prst="rect">
+            <a:avLst/>
+          </a:prstGeom>
+          <a:noFill/>
+        </p:spPr>
+        <p:txBody>
+          <a:bodyPr wrap="square" anchor="t">
+            <a:spAutoFit/>
+          </a:bodyPr>
+          <a:lstStyle/>
+          <a:p>
+            <a:pPr algn="l"/>
+            <a:r>
+              <a:rPr sz="3200" b="1">
+                <a:solidFill>
+                  <a:srgbClr val="0E4A86"/>
+                </a:solidFill>
+                <a:latin typeface="Calibri"/>
+              </a:rPr>
+              <a:t>Baselines and bias diagnostics (P3 additions)</a:t>
+            </a:r>
+          </a:p>
+        </p:txBody>
+      </p:sp>
+      <p:sp>
+        <p:nvSpPr>
+          <p:cNvPr id="3" name="TextBox 2"/>
+          <p:cNvSpPr txBox="1"/>
+          <p:nvPr/>
+        </p:nvSpPr>
+        <p:spPr>
+          <a:xfrm>
+            <a:off x="548640" y="1188720"/>
+            <a:ext cx="5852160" cy="365760"/>
+          </a:xfrm>
+          <a:prstGeom prst="rect">
+            <a:avLst/>
+          </a:prstGeom>
+          <a:noFill/>
+        </p:spPr>
+        <p:txBody>
+          <a:bodyPr wrap="square" anchor="t">
+            <a:spAutoFit/>
+          </a:bodyPr>
+          <a:lstStyle/>
+          <a:p>
+            <a:pPr algn="l"/>
+            <a:r>
+              <a:rPr sz="1500" b="1">
+                <a:solidFill>
+                  <a:srgbClr val="0E4A86"/>
+                </a:solidFill>
+                <a:latin typeface="Calibri"/>
+              </a:rPr>
+              <a:t>UMBRELA single-judge baseline</a:t>
+            </a:r>
+          </a:p>
+        </p:txBody>
+      </p:sp>
+      <p:sp>
+        <p:nvSpPr>
+          <p:cNvPr id="4" name="TextBox 3"/>
+          <p:cNvSpPr txBox="1"/>
+          <p:nvPr/>
+        </p:nvSpPr>
+        <p:spPr>
+          <a:xfrm>
+            <a:off x="548640" y="1554480"/>
+            <a:ext cx="5852160" cy="2743200"/>
+          </a:xfrm>
+          <a:prstGeom prst="rect">
+            <a:avLst/>
+          </a:prstGeom>
+          <a:noFill/>
+        </p:spPr>
+        <p:txBody>
+          <a:bodyPr wrap="square" anchor="t">
+            <a:spAutoFit/>
+          </a:bodyPr>
+          <a:lstStyle/>
+          <a:p>
+            <a:pPr algn="l"/>
+            <a:r>
+              <a:rPr sz="1200" b="0">
+                <a:solidFill>
+                  <a:srgbClr val="1A1A1A"/>
+                </a:solidFill>
+                <a:latin typeface="Consolas"/>
+              </a:rPr>
+              <a:t>(Upadhyay et al. 2024) prompt + GPT-4o on the same 537 pairs:
+    kappa vs human = 0.4265, n_valid = 537/537
+Comparison (same 537 pairs, same human qrels):
+  - UMBRELA baseline:                 0.4265
+  - Our prompt + GPT-4o:              0.4065
+  - Our prompt + Sonnet 4.6 (best):   0.5123
+  - Our 9-judge ensemble:             0.4941
+  - Our 7-judge frontier ensemble:    0.5187
+Both ensembles + best single judge &gt;&gt; UMBRELA single by 0.07-0.09 kappa.
+The contribution is the SLATE + ENSEMBLE, not the prompt.</a:t>
+            </a:r>
+          </a:p>
+        </p:txBody>
+      </p:sp>
+      <p:sp>
+        <p:nvSpPr>
+          <p:cNvPr id="5" name="TextBox 4"/>
+          <p:cNvSpPr txBox="1"/>
+          <p:nvPr/>
+        </p:nvSpPr>
+        <p:spPr>
+          <a:xfrm>
+            <a:off x="6675120" y="1188720"/>
+            <a:ext cx="5120640" cy="365760"/>
+          </a:xfrm>
+          <a:prstGeom prst="rect">
+            <a:avLst/>
+          </a:prstGeom>
+          <a:noFill/>
+        </p:spPr>
+        <p:txBody>
+          <a:bodyPr wrap="square" anchor="t">
+            <a:spAutoFit/>
+          </a:bodyPr>
+          <a:lstStyle/>
+          <a:p>
+            <a:pPr algn="l"/>
+            <a:r>
+              <a:rPr sz="1500" b="1">
+                <a:solidFill>
+                  <a:srgbClr val="0E4A86"/>
+                </a:solidFill>
+                <a:latin typeface="Calibri"/>
+              </a:rPr>
+              <a:t>Bias diagnostics (free recompute)</a:t>
+            </a:r>
+          </a:p>
+        </p:txBody>
+      </p:sp>
+      <p:sp>
+        <p:nvSpPr>
+          <p:cNvPr id="6" name="TextBox 5"/>
+          <p:cNvSpPr txBox="1"/>
+          <p:nvPr/>
+        </p:nvSpPr>
+        <p:spPr>
+          <a:xfrm>
+            <a:off x="6675120" y="1554480"/>
+            <a:ext cx="5120640" cy="2743200"/>
+          </a:xfrm>
+          <a:prstGeom prst="rect">
+            <a:avLst/>
+          </a:prstGeom>
+          <a:noFill/>
+        </p:spPr>
+        <p:txBody>
+          <a:bodyPr wrap="square" anchor="t">
+            <a:spAutoFit/>
+          </a:bodyPr>
+          <a:lstStyle/>
+          <a:p>
+            <a:pPr algn="l"/>
+            <a:r>
+              <a:rPr sz="1100" b="0">
+                <a:solidFill>
+                  <a:srgbClr val="1A1A1A"/>
+                </a:solidFill>
+                <a:latin typeface="Calibri"/>
+              </a:rPr>
+              <a:t>Family conditional-mean matrix (5x5):
+  Anthropic 2.07,  OpenAI 1.93,  Google 2.01
+  DeepSeek 2.45,   Open-weight 1.62
+  -&gt; calibration drift, NOT self-preference
+     (no family's diagonal dominates its row)
+Per-judge marginal score distributions:
+  -&gt; visualizes 3-cluster structure directly
+Length-stratified kappa: SKIPPED
+  (text_preview uniformly truncated at 240
+   chars in shipped JSONs; defer to re-extract)
+Position bias: not directly applicable
+  (single-document scoring, not pairwise)</a:t>
+            </a:r>
+          </a:p>
+        </p:txBody>
+      </p:sp>
+      <p:pic>
+        <p:nvPicPr>
+          <p:cNvPr id="7" name="Picture 6" descr="bias_diagnostics_panel.png"/>
+          <p:cNvPicPr>
+            <a:picLocks noChangeAspect="1"/>
+          </p:cNvPicPr>
+          <p:nvPr/>
+        </p:nvPicPr>
+        <p:blipFill>
+          <a:blip r:embed="rId2"/>
+          <a:stretch>
+            <a:fillRect/>
+          </a:stretch>
+        </p:blipFill>
+        <p:spPr>
+          <a:xfrm>
+            <a:off x="548640" y="4434840"/>
+            <a:ext cx="11338560" cy="2377440"/>
+          </a:xfrm>
+          <a:prstGeom prst="rect">
+            <a:avLst/>
+          </a:prstGeom>
+        </p:spPr>
+      </p:pic>
+      <p:sp>
+        <p:nvSpPr>
+          <p:cNvPr id="8" name="TextBox 7"/>
+          <p:cNvSpPr txBox="1"/>
+          <p:nvPr/>
+        </p:nvSpPr>
+        <p:spPr>
+          <a:xfrm>
+            <a:off x="457200" y="6446520"/>
+            <a:ext cx="11247120" cy="274320"/>
+          </a:xfrm>
+          <a:prstGeom prst="rect">
+            <a:avLst/>
+          </a:prstGeom>
+          <a:noFill/>
+        </p:spPr>
+        <p:txBody>
+          <a:bodyPr wrap="square" anchor="t">
+            <a:spAutoFit/>
+          </a:bodyPr>
+          <a:lstStyle/>
+          <a:p>
+            <a:pPr algn="l"/>
+            <a:r>
+              <a:rPr sz="1000" b="0">
+                <a:solidFill>
+                  <a:srgbClr val="707070"/>
+                </a:solidFill>
+                <a:latin typeface="Calibri"/>
+              </a:rPr>
+              <a:t>P4 — SHORT</a:t>
+            </a:r>
+          </a:p>
+        </p:txBody>
+      </p:sp>
+      <p:sp>
+        <p:nvSpPr>
+          <p:cNvPr id="9" name="TextBox 8"/>
+          <p:cNvSpPr txBox="1"/>
+          <p:nvPr/>
+        </p:nvSpPr>
+        <p:spPr>
+          <a:xfrm>
+            <a:off x="11430000" y="6446520"/>
+            <a:ext cx="640080" cy="274320"/>
+          </a:xfrm>
+          <a:prstGeom prst="rect">
+            <a:avLst/>
+          </a:prstGeom>
+          <a:noFill/>
+        </p:spPr>
+        <p:txBody>
+          <a:bodyPr wrap="square" anchor="t">
+            <a:spAutoFit/>
+          </a:bodyPr>
+          <a:lstStyle/>
+          <a:p>
+            <a:pPr algn="r"/>
+            <a:r>
+              <a:rPr sz="1000" b="0">
+                <a:solidFill>
+                  <a:srgbClr val="707070"/>
+                </a:solidFill>
+                <a:latin typeface="Calibri"/>
+              </a:rPr>
+              <a:t>14/17</a:t>
+            </a:r>
+          </a:p>
+        </p:txBody>
+      </p:sp>
+    </p:spTree>
+  </p:cSld>
+  <p:clrMapOvr>
+    <a:masterClrMapping/>
+  </p:clrMapOvr>
+</p:sld>
+</file>
+
+<file path=ppt/slides/slide15.xml><?xml version="1.0" encoding="utf-8"?>
 <p:sld xmlns:a="http://schemas.openxmlformats.org/drawingml/2006/main" xmlns:p="http://schemas.openxmlformats.org/presentationml/2006/main" xmlns:r="http://schemas.openxmlformats.org/officeDocument/2006/relationships">
   <p:cSld>
     <p:spTree>
@@ -7526,233 +7834,7 @@
                 </a:solidFill>
                 <a:latin typeface="Calibri"/>
               </a:rPr>
-              <a:t>14/16</a:t>
-            </a:r>
-          </a:p>
-        </p:txBody>
-      </p:sp>
-    </p:spTree>
-  </p:cSld>
-  <p:clrMapOvr>
-    <a:masterClrMapping/>
-  </p:clrMapOvr>
-</p:sld>
-</file>
-
-<file path=ppt/slides/slide15.xml><?xml version="1.0" encoding="utf-8"?>
-<p:sld xmlns:a="http://schemas.openxmlformats.org/drawingml/2006/main" xmlns:p="http://schemas.openxmlformats.org/presentationml/2006/main" xmlns:r="http://schemas.openxmlformats.org/officeDocument/2006/relationships">
-  <p:cSld>
-    <p:spTree>
-      <p:nvGrpSpPr>
-        <p:cNvPr id="1" name=""/>
-        <p:cNvGrpSpPr/>
-        <p:nvPr/>
-      </p:nvGrpSpPr>
-      <p:grpSpPr/>
-      <p:sp>
-        <p:nvSpPr>
-          <p:cNvPr id="2" name="TextBox 1"/>
-          <p:cNvSpPr txBox="1"/>
-          <p:nvPr/>
-        </p:nvSpPr>
-        <p:spPr>
-          <a:xfrm>
-            <a:off x="457200" y="320040"/>
-            <a:ext cx="11247120" cy="640080"/>
-          </a:xfrm>
-          <a:prstGeom prst="rect">
-            <a:avLst/>
-          </a:prstGeom>
-          <a:noFill/>
-        </p:spPr>
-        <p:txBody>
-          <a:bodyPr wrap="square" anchor="t">
-            <a:spAutoFit/>
-          </a:bodyPr>
-          <a:lstStyle/>
-          <a:p>
-            <a:pPr algn="l"/>
-            <a:r>
-              <a:rPr sz="3200" b="1">
-                <a:solidFill>
-                  <a:srgbClr val="0E4A86"/>
-                </a:solidFill>
-                <a:latin typeface="Calibri"/>
-              </a:rPr>
-              <a:t>Takeaway</a:t>
-            </a:r>
-          </a:p>
-        </p:txBody>
-      </p:sp>
-      <p:sp>
-        <p:nvSpPr>
-          <p:cNvPr id="3" name="TextBox 2"/>
-          <p:cNvSpPr txBox="1"/>
-          <p:nvPr/>
-        </p:nvSpPr>
-        <p:spPr>
-          <a:xfrm>
-            <a:off x="640080" y="1280160"/>
-            <a:ext cx="11430000" cy="4572000"/>
-          </a:xfrm>
-          <a:prstGeom prst="rect">
-            <a:avLst/>
-          </a:prstGeom>
-          <a:noFill/>
-        </p:spPr>
-        <p:txBody>
-          <a:bodyPr wrap="square">
-            <a:spAutoFit/>
-          </a:bodyPr>
-          <a:lstStyle/>
-          <a:p>
-            <a:pPr>
-              <a:lnSpc>
-                <a:spcPct val="135000"/>
-              </a:lnSpc>
-            </a:pPr>
-            <a:r>
-              <a:rPr sz="1800" b="1">
-                <a:solidFill>
-                  <a:srgbClr val="1A1A1A"/>
-                </a:solidFill>
-                <a:latin typeface="Calibri"/>
-              </a:rPr>
-              <a:t>• CALIBRATION PHILOSOPHY (lenient vs strict score-allocation pattern), NOT provider lineage, is the axis on which retrieval verdicts shift</a:t>
-            </a:r>
-          </a:p>
-          <a:p>
-            <a:pPr>
-              <a:lnSpc>
-                <a:spcPct val="135000"/>
-              </a:lnSpc>
-            </a:pPr>
-            <a:r>
-              <a:rPr sz="1800" b="0">
-                <a:solidFill>
-                  <a:srgbClr val="1A1A1A"/>
-                </a:solidFill>
-                <a:latin typeface="Calibri"/>
-              </a:rPr>
-              <a:t>• Cross-family agreement (κ ≥ 0.75) is high enough that judge interchangeability is a defensible default for reasoning-capable commercial judges</a:t>
-            </a:r>
-          </a:p>
-          <a:p>
-            <a:pPr>
-              <a:lnSpc>
-                <a:spcPct val="135000"/>
-              </a:lnSpc>
-            </a:pPr>
-            <a:r>
-              <a:rPr sz="1800" b="1">
-                <a:solidFill>
-                  <a:srgbClr val="1A1A1A"/>
-                </a:solidFill>
-                <a:latin typeface="Calibri"/>
-              </a:rPr>
-              <a:t>• Cross-organization open-weight ensemble (Qwen + Gemma 4) achieves matrix-highest κ at ~1% commercial cost — sovereign-cloud / on-prem deployments are NOT condemned to lower-quality judging</a:t>
-            </a:r>
-          </a:p>
-          <a:p>
-            <a:pPr>
-              <a:lnSpc>
-                <a:spcPct val="135000"/>
-              </a:lnSpc>
-            </a:pPr>
-            <a:r>
-              <a:rPr sz="1800" b="0">
-                <a:solidFill>
-                  <a:srgbClr val="1A1A1A"/>
-                </a:solidFill>
-                <a:latin typeface="Calibri"/>
-              </a:rPr>
-              <a:t>• External NIST validation (κ = 0.49 ensemble) confirms moderate-substantial agreement on a public IR benchmark</a:t>
-            </a:r>
-          </a:p>
-          <a:p>
-            <a:pPr>
-              <a:lnSpc>
-                <a:spcPct val="135000"/>
-              </a:lnSpc>
-            </a:pPr>
-            <a:r>
-              <a:rPr sz="1800" b="1">
-                <a:solidFill>
-                  <a:srgbClr val="1A1A1A"/>
-                </a:solidFill>
-                <a:latin typeface="Calibri"/>
-              </a:rPr>
-              <a:t>• Mechanism: 93% of pairwise κ variance is joint-distribution structure of paired scores — a NEW insight for ensemble design</a:t>
-            </a:r>
-          </a:p>
-        </p:txBody>
-      </p:sp>
-      <p:sp>
-        <p:nvSpPr>
-          <p:cNvPr id="4" name="TextBox 3"/>
-          <p:cNvSpPr txBox="1"/>
-          <p:nvPr/>
-        </p:nvSpPr>
-        <p:spPr>
-          <a:xfrm>
-            <a:off x="457200" y="6446520"/>
-            <a:ext cx="11247120" cy="274320"/>
-          </a:xfrm>
-          <a:prstGeom prst="rect">
-            <a:avLst/>
-          </a:prstGeom>
-          <a:noFill/>
-        </p:spPr>
-        <p:txBody>
-          <a:bodyPr wrap="square" anchor="t">
-            <a:spAutoFit/>
-          </a:bodyPr>
-          <a:lstStyle/>
-          <a:p>
-            <a:pPr algn="l"/>
-            <a:r>
-              <a:rPr sz="1000" b="0">
-                <a:solidFill>
-                  <a:srgbClr val="707070"/>
-                </a:solidFill>
-                <a:latin typeface="Calibri"/>
-              </a:rPr>
-              <a:t>P4 — SHORT</a:t>
-            </a:r>
-          </a:p>
-        </p:txBody>
-      </p:sp>
-      <p:sp>
-        <p:nvSpPr>
-          <p:cNvPr id="5" name="TextBox 4"/>
-          <p:cNvSpPr txBox="1"/>
-          <p:nvPr/>
-        </p:nvSpPr>
-        <p:spPr>
-          <a:xfrm>
-            <a:off x="11430000" y="6446520"/>
-            <a:ext cx="640080" cy="274320"/>
-          </a:xfrm>
-          <a:prstGeom prst="rect">
-            <a:avLst/>
-          </a:prstGeom>
-          <a:noFill/>
-        </p:spPr>
-        <p:txBody>
-          <a:bodyPr wrap="square" anchor="t">
-            <a:spAutoFit/>
-          </a:bodyPr>
-          <a:lstStyle/>
-          <a:p>
-            <a:pPr algn="r"/>
-            <a:r>
-              <a:rPr sz="1000" b="0">
-                <a:solidFill>
-                  <a:srgbClr val="707070"/>
-                </a:solidFill>
-                <a:latin typeface="Calibri"/>
-              </a:rPr>
-              <a:t>15/16</a:t>
+              <a:t>15/17</a:t>
             </a:r>
           </a:p>
         </p:txBody>
@@ -7783,6 +7865,232 @@
         </p:nvSpPr>
         <p:spPr>
           <a:xfrm>
+            <a:off x="457200" y="320040"/>
+            <a:ext cx="11247120" cy="640080"/>
+          </a:xfrm>
+          <a:prstGeom prst="rect">
+            <a:avLst/>
+          </a:prstGeom>
+          <a:noFill/>
+        </p:spPr>
+        <p:txBody>
+          <a:bodyPr wrap="square" anchor="t">
+            <a:spAutoFit/>
+          </a:bodyPr>
+          <a:lstStyle/>
+          <a:p>
+            <a:pPr algn="l"/>
+            <a:r>
+              <a:rPr sz="3200" b="1">
+                <a:solidFill>
+                  <a:srgbClr val="0E4A86"/>
+                </a:solidFill>
+                <a:latin typeface="Calibri"/>
+              </a:rPr>
+              <a:t>Takeaway</a:t>
+            </a:r>
+          </a:p>
+        </p:txBody>
+      </p:sp>
+      <p:sp>
+        <p:nvSpPr>
+          <p:cNvPr id="3" name="TextBox 2"/>
+          <p:cNvSpPr txBox="1"/>
+          <p:nvPr/>
+        </p:nvSpPr>
+        <p:spPr>
+          <a:xfrm>
+            <a:off x="640080" y="1280160"/>
+            <a:ext cx="11430000" cy="4572000"/>
+          </a:xfrm>
+          <a:prstGeom prst="rect">
+            <a:avLst/>
+          </a:prstGeom>
+          <a:noFill/>
+        </p:spPr>
+        <p:txBody>
+          <a:bodyPr wrap="square">
+            <a:spAutoFit/>
+          </a:bodyPr>
+          <a:lstStyle/>
+          <a:p>
+            <a:pPr>
+              <a:lnSpc>
+                <a:spcPct val="135000"/>
+              </a:lnSpc>
+            </a:pPr>
+            <a:r>
+              <a:rPr sz="1800" b="1">
+                <a:solidFill>
+                  <a:srgbClr val="1A1A1A"/>
+                </a:solidFill>
+                <a:latin typeface="Calibri"/>
+              </a:rPr>
+              <a:t>• CALIBRATION PHILOSOPHY (lenient vs strict score-allocation pattern), NOT provider lineage, is the axis on which retrieval verdicts shift</a:t>
+            </a:r>
+          </a:p>
+          <a:p>
+            <a:pPr>
+              <a:lnSpc>
+                <a:spcPct val="135000"/>
+              </a:lnSpc>
+            </a:pPr>
+            <a:r>
+              <a:rPr sz="1800" b="0">
+                <a:solidFill>
+                  <a:srgbClr val="1A1A1A"/>
+                </a:solidFill>
+                <a:latin typeface="Calibri"/>
+              </a:rPr>
+              <a:t>• Cross-family agreement (κ ≥ 0.75) is high enough that judge interchangeability is a defensible default for reasoning-capable commercial judges</a:t>
+            </a:r>
+          </a:p>
+          <a:p>
+            <a:pPr>
+              <a:lnSpc>
+                <a:spcPct val="135000"/>
+              </a:lnSpc>
+            </a:pPr>
+            <a:r>
+              <a:rPr sz="1800" b="1">
+                <a:solidFill>
+                  <a:srgbClr val="1A1A1A"/>
+                </a:solidFill>
+                <a:latin typeface="Calibri"/>
+              </a:rPr>
+              <a:t>• Cross-organization open-weight ensemble (Qwen + Gemma 4) achieves matrix-highest κ at ~1% commercial cost — sovereign-cloud / on-prem deployments are NOT condemned to lower-quality judging</a:t>
+            </a:r>
+          </a:p>
+          <a:p>
+            <a:pPr>
+              <a:lnSpc>
+                <a:spcPct val="135000"/>
+              </a:lnSpc>
+            </a:pPr>
+            <a:r>
+              <a:rPr sz="1800" b="0">
+                <a:solidFill>
+                  <a:srgbClr val="1A1A1A"/>
+                </a:solidFill>
+                <a:latin typeface="Calibri"/>
+              </a:rPr>
+              <a:t>• External NIST validation (κ = 0.49 ensemble) confirms moderate-substantial agreement on a public IR benchmark</a:t>
+            </a:r>
+          </a:p>
+          <a:p>
+            <a:pPr>
+              <a:lnSpc>
+                <a:spcPct val="135000"/>
+              </a:lnSpc>
+            </a:pPr>
+            <a:r>
+              <a:rPr sz="1800" b="1">
+                <a:solidFill>
+                  <a:srgbClr val="1A1A1A"/>
+                </a:solidFill>
+                <a:latin typeface="Calibri"/>
+              </a:rPr>
+              <a:t>• Mechanism: 93% of pairwise κ variance is joint-distribution structure of paired scores — a NEW insight for ensemble design</a:t>
+            </a:r>
+          </a:p>
+        </p:txBody>
+      </p:sp>
+      <p:sp>
+        <p:nvSpPr>
+          <p:cNvPr id="4" name="TextBox 3"/>
+          <p:cNvSpPr txBox="1"/>
+          <p:nvPr/>
+        </p:nvSpPr>
+        <p:spPr>
+          <a:xfrm>
+            <a:off x="457200" y="6446520"/>
+            <a:ext cx="11247120" cy="274320"/>
+          </a:xfrm>
+          <a:prstGeom prst="rect">
+            <a:avLst/>
+          </a:prstGeom>
+          <a:noFill/>
+        </p:spPr>
+        <p:txBody>
+          <a:bodyPr wrap="square" anchor="t">
+            <a:spAutoFit/>
+          </a:bodyPr>
+          <a:lstStyle/>
+          <a:p>
+            <a:pPr algn="l"/>
+            <a:r>
+              <a:rPr sz="1000" b="0">
+                <a:solidFill>
+                  <a:srgbClr val="707070"/>
+                </a:solidFill>
+                <a:latin typeface="Calibri"/>
+              </a:rPr>
+              <a:t>P4 — SHORT</a:t>
+            </a:r>
+          </a:p>
+        </p:txBody>
+      </p:sp>
+      <p:sp>
+        <p:nvSpPr>
+          <p:cNvPr id="5" name="TextBox 4"/>
+          <p:cNvSpPr txBox="1"/>
+          <p:nvPr/>
+        </p:nvSpPr>
+        <p:spPr>
+          <a:xfrm>
+            <a:off x="11430000" y="6446520"/>
+            <a:ext cx="640080" cy="274320"/>
+          </a:xfrm>
+          <a:prstGeom prst="rect">
+            <a:avLst/>
+          </a:prstGeom>
+          <a:noFill/>
+        </p:spPr>
+        <p:txBody>
+          <a:bodyPr wrap="square" anchor="t">
+            <a:spAutoFit/>
+          </a:bodyPr>
+          <a:lstStyle/>
+          <a:p>
+            <a:pPr algn="r"/>
+            <a:r>
+              <a:rPr sz="1000" b="0">
+                <a:solidFill>
+                  <a:srgbClr val="707070"/>
+                </a:solidFill>
+                <a:latin typeface="Calibri"/>
+              </a:rPr>
+              <a:t>16/17</a:t>
+            </a:r>
+          </a:p>
+        </p:txBody>
+      </p:sp>
+    </p:spTree>
+  </p:cSld>
+  <p:clrMapOvr>
+    <a:masterClrMapping/>
+  </p:clrMapOvr>
+</p:sld>
+</file>
+
+<file path=ppt/slides/slide17.xml><?xml version="1.0" encoding="utf-8"?>
+<p:sld xmlns:a="http://schemas.openxmlformats.org/drawingml/2006/main" xmlns:p="http://schemas.openxmlformats.org/presentationml/2006/main" xmlns:r="http://schemas.openxmlformats.org/officeDocument/2006/relationships">
+  <p:cSld>
+    <p:spTree>
+      <p:nvGrpSpPr>
+        <p:cNvPr id="1" name=""/>
+        <p:cNvGrpSpPr/>
+        <p:nvPr/>
+      </p:nvGrpSpPr>
+      <p:grpSpPr/>
+      <p:sp>
+        <p:nvSpPr>
+          <p:cNvPr id="2" name="TextBox 1"/>
+          <p:cNvSpPr txBox="1"/>
+          <p:nvPr/>
+        </p:nvSpPr>
+        <p:spPr>
+          <a:xfrm>
             <a:off x="914400" y="2286000"/>
             <a:ext cx="10332720" cy="1371600"/>
           </a:xfrm>
@@ -7945,7 +8253,7 @@
                 </a:solidFill>
                 <a:latin typeface="Calibri"/>
               </a:rPr>
-              <a:t>16/16</a:t>
+              <a:t>17/17</a:t>
             </a:r>
           </a:p>
         </p:txBody>
@@ -8206,7 +8514,7 @@
                 </a:solidFill>
                 <a:latin typeface="Calibri"/>
               </a:rPr>
-              <a:t>2/16</a:t>
+              <a:t>2/17</a:t>
             </a:r>
           </a:p>
         </p:txBody>
@@ -8483,7 +8791,7 @@
                 </a:solidFill>
                 <a:latin typeface="Calibri"/>
               </a:rPr>
-              <a:t>3/16</a:t>
+              <a:t>3/17</a:t>
             </a:r>
           </a:p>
         </p:txBody>
@@ -9840,7 +10148,7 @@
                 </a:solidFill>
                 <a:latin typeface="Calibri"/>
               </a:rPr>
-              <a:t>4/16</a:t>
+              <a:t>4/17</a:t>
             </a:r>
           </a:p>
         </p:txBody>
@@ -10022,7 +10330,7 @@
                 </a:solidFill>
                 <a:latin typeface="Calibri"/>
               </a:rPr>
-              <a:t>5/16</a:t>
+              <a:t>5/17</a:t>
             </a:r>
           </a:p>
         </p:txBody>
@@ -11610,7 +11918,7 @@
                 </a:solidFill>
                 <a:latin typeface="Calibri"/>
               </a:rPr>
-              <a:t>6/16</a:t>
+              <a:t>6/17</a:t>
             </a:r>
           </a:p>
         </p:txBody>
@@ -11792,7 +12100,7 @@
                 </a:solidFill>
                 <a:latin typeface="Calibri"/>
               </a:rPr>
-              <a:t>7/16</a:t>
+              <a:t>7/17</a:t>
             </a:r>
           </a:p>
         </p:txBody>
@@ -11939,7 +12247,7 @@
                 </a:solidFill>
                 <a:latin typeface="Calibri"/>
               </a:rPr>
-              <a:t>8/16</a:t>
+              <a:t>8/17</a:t>
             </a:r>
           </a:p>
         </p:txBody>
@@ -12165,7 +12473,7 @@
                 </a:solidFill>
                 <a:latin typeface="Calibri"/>
               </a:rPr>
-              <a:t>9/16</a:t>
+              <a:t>9/17</a:t>
             </a:r>
           </a:p>
         </p:txBody>
